--- a/servers/presentation/output/magnit_loginom_pitch.pptx
+++ b/servers/presentation/output/magnit_loginom_pitch.pptx
@@ -1417,7 +1417,7 @@
             <a:avLst/>
           </a:prstGeom>
           <a:solidFill>
-            <a:srgbClr val="1A56A0"/>
+            <a:srgbClr val="1E2433"/>
           </a:solidFill>
           <a:ln/>
         </p:spPr>
@@ -1437,7 +1437,7 @@
             <a:avLst/>
           </a:prstGeom>
           <a:solidFill>
-            <a:srgbClr val="153F7A"/>
+            <a:srgbClr val="252B3B"/>
           </a:solidFill>
           <a:ln/>
         </p:spPr>
@@ -1469,7 +1469,7 @@
             <a:r>
               <a:rPr lang="en-US" sz="1300" b="1" spc="300" kern="0" dirty="0">
                 <a:solidFill>
-                  <a:srgbClr val="AACCEE"/>
+                  <a:srgbClr val="9BA3B0"/>
                 </a:solidFill>
               </a:rPr>
               <a:t>КОММЕРЧЕСКОЕ ПРЕДЛОЖЕНИЕ</a:t>
@@ -1541,10 +1541,10 @@
             <a:r>
               <a:rPr lang="en-US" sz="1800" i="1" dirty="0">
                 <a:solidFill>
-                  <a:srgbClr val="AACCEE"/>
-                </a:solidFill>
-              </a:rPr>
-              <a:t>Розничная торговля (FMCG)</a:t>
+                  <a:srgbClr val="9BA3B0"/>
+                </a:solidFill>
+              </a:rPr>
+              <a:t>Продуктовая розничная торговля (FMCG)</a:t>
             </a:r>
             <a:endParaRPr lang="en-US" sz="1800" dirty="0"/>
           </a:p>
@@ -1565,7 +1565,7 @@
             <a:avLst/>
           </a:prstGeom>
           <a:solidFill>
-            <a:srgbClr val="3A6EB5"/>
+            <a:srgbClr val="252B3B"/>
           </a:solidFill>
           <a:ln/>
         </p:spPr>
@@ -1633,7 +1633,7 @@
             <a:r>
               <a:rPr lang="en-US" sz="1300" dirty="0">
                 <a:solidFill>
-                  <a:srgbClr val="AACCEE"/>
+                  <a:srgbClr val="9BA3B0"/>
                 </a:solidFill>
               </a:rPr>
               <a:t>loginom.ru</a:t>
@@ -1669,10 +1669,10 @@
             <a:r>
               <a:rPr lang="en-US" sz="1300" dirty="0">
                 <a:solidFill>
-                  <a:srgbClr val="AACCEE"/>
-                </a:solidFill>
-              </a:rPr>
-              <a:t>12 мая 2026 г.</a:t>
+                  <a:srgbClr val="9BA3B0"/>
+                </a:solidFill>
+              </a:rPr>
+              <a:t>6 июня 2026 г.</a:t>
             </a:r>
             <a:endParaRPr lang="en-US" sz="1300" dirty="0"/>
           </a:p>
@@ -1718,7 +1718,7 @@
             <a:avLst/>
           </a:prstGeom>
           <a:solidFill>
-            <a:srgbClr val="1A56A0"/>
+            <a:srgbClr val="1E2433"/>
           </a:solidFill>
           <a:ln/>
         </p:spPr>
@@ -1786,7 +1786,7 @@
             <a:r>
               <a:rPr lang="en-US" sz="1300" b="1" dirty="0">
                 <a:solidFill>
-                  <a:srgbClr val="1A56A0"/>
+                  <a:srgbClr val="D4312A"/>
                 </a:solidFill>
               </a:rPr>
               <a:t>Запрос клиента</a:t>
@@ -1810,11 +1810,11 @@
             <a:avLst/>
           </a:prstGeom>
           <a:solidFill>
-            <a:srgbClr val="E8F0FA"/>
+            <a:srgbClr val="F4F5F7"/>
           </a:solidFill>
           <a:ln w="12700">
             <a:solidFill>
-              <a:srgbClr val="D0D8E8"/>
+              <a:srgbClr val="E2E5EA"/>
             </a:solidFill>
             <a:prstDash val="solid"/>
           </a:ln>
@@ -1847,10 +1847,10 @@
             <a:r>
               <a:rPr lang="en-US" sz="1200" dirty="0">
                 <a:solidFill>
-                  <a:srgbClr val="1A1A2E"/>
-                </a:solidFill>
-              </a:rPr>
-              <a:t>Система автоматического прогнозирования спроса и оптимизации товарных остатков для сети из 29 000 магазинов. Цели: снизить списания скоропортящихся товаров и уменьшить out-of-stock по ключевым позициям. Старт — пилот на одном регионе.</a:t>
+                  <a:srgbClr val="1E2433"/>
+                </a:solidFill>
+              </a:rPr>
+              <a:t>Система автоматического прогнозирования спроса и оптимизации товарных остатков для сети из 29 000 магазинов. Задача — снизить списания скоропортящихся товаров и уменьшить out-of-stock по ключевым позициям. Старт — пилот на одном регионе.</a:t>
             </a:r>
             <a:endParaRPr lang="en-US" sz="1200" dirty="0"/>
           </a:p>
@@ -1871,11 +1871,11 @@
             <a:avLst/>
           </a:prstGeom>
           <a:solidFill>
-            <a:srgbClr val="E8F0FA"/>
+            <a:srgbClr val="F4F5F7"/>
           </a:solidFill>
           <a:ln w="12700">
             <a:solidFill>
-              <a:srgbClr val="1A56A0"/>
+              <a:srgbClr val="D4312A"/>
             </a:solidFill>
             <a:prstDash val="solid"/>
           </a:ln>
@@ -1908,7 +1908,7 @@
             <a:r>
               <a:rPr lang="en-US" sz="1100" b="1" dirty="0">
                 <a:solidFill>
-                  <a:srgbClr val="1A56A0"/>
+                  <a:srgbClr val="D4312A"/>
                 </a:solidFill>
               </a:rPr>
               <a:t>Бюджет: 5–8 млн руб.</a:t>
@@ -1932,11 +1932,11 @@
             <a:avLst/>
           </a:prstGeom>
           <a:solidFill>
-            <a:srgbClr val="E8F0FA"/>
+            <a:srgbClr val="F4F5F7"/>
           </a:solidFill>
           <a:ln w="12700">
             <a:solidFill>
-              <a:srgbClr val="1A56A0"/>
+              <a:srgbClr val="D4312A"/>
             </a:solidFill>
             <a:prstDash val="solid"/>
           </a:ln>
@@ -1969,7 +1969,7 @@
             <a:r>
               <a:rPr lang="en-US" sz="1100" b="1" dirty="0">
                 <a:solidFill>
-                  <a:srgbClr val="1A56A0"/>
+                  <a:srgbClr val="D4312A"/>
                 </a:solidFill>
               </a:rPr>
               <a:t>Срок: 10 месяцев</a:t>
@@ -1987,17 +1987,17 @@
         <p:spPr>
           <a:xfrm>
             <a:off x="365760" y="4114800"/>
-            <a:ext cx="5596128" cy="347472"/>
-          </a:xfrm>
-          <a:prstGeom prst="rect">
-            <a:avLst/>
-          </a:prstGeom>
-          <a:solidFill>
-            <a:srgbClr val="E8F0FA"/>
+            <a:ext cx="2980944" cy="347472"/>
+          </a:xfrm>
+          <a:prstGeom prst="rect">
+            <a:avLst/>
+          </a:prstGeom>
+          <a:solidFill>
+            <a:srgbClr val="F4F5F7"/>
           </a:solidFill>
           <a:ln w="12700">
             <a:solidFill>
-              <a:srgbClr val="1A56A0"/>
+              <a:srgbClr val="D4312A"/>
             </a:solidFill>
             <a:prstDash val="solid"/>
           </a:ln>
@@ -2012,7 +2012,7 @@
         <p:spPr>
           <a:xfrm>
             <a:off x="475488" y="4151376"/>
-            <a:ext cx="5413248" cy="274320"/>
+            <a:ext cx="2798064" cy="274320"/>
           </a:xfrm>
           <a:prstGeom prst="rect">
             <a:avLst/>
@@ -2030,10 +2030,10 @@
             <a:r>
               <a:rPr lang="en-US" sz="1100" b="1" dirty="0">
                 <a:solidFill>
-                  <a:srgbClr val="1A56A0"/>
-                </a:solidFill>
-              </a:rPr>
-              <a:t>Пилот на одном регионе (~500–1000 магазинов)</a:t>
+                  <a:srgbClr val="D4312A"/>
+                </a:solidFill>
+              </a:rPr>
+              <a:t>Пилот на одном регионе</a:t>
             </a:r>
             <a:endParaRPr lang="en-US" sz="1100" dirty="0"/>
           </a:p>
@@ -2066,7 +2066,7 @@
             <a:r>
               <a:rPr lang="en-US" sz="1300" b="1" dirty="0">
                 <a:solidFill>
-                  <a:srgbClr val="1A56A0"/>
+                  <a:srgbClr val="D4312A"/>
                 </a:solidFill>
               </a:rPr>
               <a:t>Контекст и боль</a:t>
@@ -2102,10 +2102,10 @@
             <a:r>
               <a:rPr lang="en-US" sz="1200" dirty="0">
                 <a:solidFill>
-                  <a:srgbClr val="1A1A2E"/>
-                </a:solidFill>
-              </a:rPr>
-              <a:t>Управление запасами в сети из 29 000 магазинов — одна из наиболее сложных задач в ритейле. Спрос зависит от сезонности, промо-активностей, локальных событий и сотен других факторов. При ручном или упрощённом автоматическом планировании неизбежны либо избыточные запасы (→ списания скоропортящихся), либо их дефицит (→ out-of-stock). Задача усложняется тем, что нужно учитывать сроки годности, логистические ограничения и разную динамику спроса по регионам и форматам магазинов.</a:t>
+                  <a:srgbClr val="1E2433"/>
+                </a:solidFill>
+              </a:rPr>
+              <a:t>В сети из 29 000 магазинов ежедневно формируются миллионы транзакций по тысячам SKU с выраженной сезонностью, промо-активностью и локальными особенностями спроса. Традиционные методы (нормативы в Excel, статичные правила пополнения в ERP) не успевают адаптироваться к реальным колебаниям спроса. Скоропортящиеся товары требуют особой точности: переизбыток ведёт к списаниям, дефицит — к out-of-stock. Построить точную прогностическую модель вручную при таком масштабе физически невозможно — нужна автоматизированная система машинного обучения.</a:t>
             </a:r>
             <a:endParaRPr lang="en-US" sz="1200" dirty="0"/>
           </a:p>
@@ -2138,7 +2138,7 @@
             <a:r>
               <a:rPr lang="en-US" sz="1200" b="1" dirty="0">
                 <a:solidFill>
-                  <a:srgbClr val="1A1A2E"/>
+                  <a:srgbClr val="1E2433"/>
                 </a:solidFill>
               </a:rPr>
               <a:t>Что будет, если не решить:</a:t>
@@ -2162,7 +2162,7 @@
             <a:avLst/>
           </a:prstGeom>
           <a:solidFill>
-            <a:srgbClr val="F0A500"/>
+            <a:srgbClr val="D4312A"/>
           </a:solidFill>
           <a:ln/>
         </p:spPr>
@@ -2194,10 +2194,10 @@
             <a:r>
               <a:rPr lang="en-US" sz="1200" dirty="0">
                 <a:solidFill>
-                  <a:srgbClr val="1A1A2E"/>
-                </a:solidFill>
-              </a:rPr>
-              <a:t>Ежегодные потери от списаний скоропортящихся товаров исчисляются сотнями миллионов рублей по всей сети</a:t>
+                  <a:srgbClr val="1E2433"/>
+                </a:solidFill>
+              </a:rPr>
+              <a:t>Ежегодные финансовые потери от списания скоропортящихся товаров исчисляются сотнями миллионов рублей при ручном управлении заказами.</a:t>
             </a:r>
             <a:endParaRPr lang="en-US" sz="1200" dirty="0"/>
           </a:p>
@@ -2218,7 +2218,7 @@
             <a:avLst/>
           </a:prstGeom>
           <a:solidFill>
-            <a:srgbClr val="F0A500"/>
+            <a:srgbClr val="D4312A"/>
           </a:solidFill>
           <a:ln/>
         </p:spPr>
@@ -2250,10 +2250,10 @@
             <a:r>
               <a:rPr lang="en-US" sz="1200" dirty="0">
                 <a:solidFill>
-                  <a:srgbClr val="1A1A2E"/>
-                </a:solidFill>
-              </a:rPr>
-              <a:t>Out-of-stock по ключевым позициям напрямую ведёт к потере выручки и лояльности покупателей</a:t>
+                  <a:srgbClr val="1E2433"/>
+                </a:solidFill>
+              </a:rPr>
+              <a:t>Out-of-stock по ключевым позициям ведёт к прямым потерям выручки и снижению лояльности покупателей в условиях высокой конкуренции.</a:t>
             </a:r>
             <a:endParaRPr lang="en-US" sz="1200" dirty="0"/>
           </a:p>
@@ -2274,7 +2274,7 @@
             <a:avLst/>
           </a:prstGeom>
           <a:solidFill>
-            <a:srgbClr val="F0A500"/>
+            <a:srgbClr val="D4312A"/>
           </a:solidFill>
           <a:ln/>
         </p:spPr>
@@ -2306,10 +2306,10 @@
             <a:r>
               <a:rPr lang="en-US" sz="1200" dirty="0">
                 <a:solidFill>
-                  <a:srgbClr val="1A1A2E"/>
-                </a:solidFill>
-              </a:rPr>
-              <a:t>Ручное управление заказами при 29 000 магазинов не масштабируется и создаёт системные ошибки</a:t>
+                  <a:srgbClr val="1E2433"/>
+                </a:solidFill>
+              </a:rPr>
+              <a:t>Без автоматизированного прогноза операционная нагрузка на категорийных менеджеров постоянно растёт вместе с расширением сети, превращая управление запасами в неуправляемый процесс.</a:t>
             </a:r>
             <a:endParaRPr lang="en-US" sz="1200" dirty="0"/>
           </a:p>
@@ -2355,7 +2355,7 @@
             <a:avLst/>
           </a:prstGeom>
           <a:solidFill>
-            <a:srgbClr val="1A56A0"/>
+            <a:srgbClr val="1E2433"/>
           </a:solidFill>
           <a:ln/>
         </p:spPr>
@@ -2404,18 +2404,133 @@
         </p:nvSpPr>
         <p:spPr>
           <a:xfrm>
-            <a:off x="365760" y="1097280"/>
-            <a:ext cx="11430000" cy="5029200"/>
-          </a:xfrm>
-          <a:prstGeom prst="rect">
-            <a:avLst/>
-          </a:prstGeom>
-          <a:solidFill>
-            <a:srgbClr val="E8F0FA"/>
+            <a:off x="0" y="1005840"/>
+            <a:ext cx="4114800" cy="5852160"/>
+          </a:xfrm>
+          <a:prstGeom prst="rect">
+            <a:avLst/>
+          </a:prstGeom>
+          <a:solidFill>
+            <a:srgbClr val="1E2433"/>
+          </a:solidFill>
+          <a:ln/>
+        </p:spPr>
+      </p:sp>
+      <p:sp>
+        <p:nvSpPr>
+          <p:cNvPr id="5" name="Shape 3"/>
+          <p:cNvSpPr/>
+          <p:nvPr/>
+        </p:nvSpPr>
+        <p:spPr>
+          <a:xfrm>
+            <a:off x="365760" y="1371600"/>
+            <a:ext cx="1645920" cy="54864"/>
+          </a:xfrm>
+          <a:prstGeom prst="rect">
+            <a:avLst/>
+          </a:prstGeom>
+          <a:solidFill>
+            <a:srgbClr val="D4312A"/>
+          </a:solidFill>
+          <a:ln/>
+        </p:spPr>
+      </p:sp>
+      <p:sp>
+        <p:nvSpPr>
+          <p:cNvPr id="6" name="Text 4"/>
+          <p:cNvSpPr/>
+          <p:nvPr/>
+        </p:nvSpPr>
+        <p:spPr>
+          <a:xfrm>
+            <a:off x="365760" y="1508760"/>
+            <a:ext cx="3383280" cy="457200"/>
+          </a:xfrm>
+          <a:prstGeom prst="rect">
+            <a:avLst/>
+          </a:prstGeom>
+          <a:noFill/>
+          <a:ln/>
+        </p:spPr>
+        <p:txBody>
+          <a:bodyPr wrap="square" rtlCol="0" anchor="ctr"/>
+          <a:lstStyle/>
+          <a:p>
+            <a:pPr indent="0" marL="0">
+              <a:buNone/>
+            </a:pPr>
+            <a:r>
+              <a:rPr lang="en-US" sz="1400" b="1" dirty="0">
+                <a:solidFill>
+                  <a:srgbClr val="D4312A"/>
+                </a:solidFill>
+              </a:rPr>
+              <a:t>Концепция</a:t>
+            </a:r>
+            <a:endParaRPr lang="en-US" sz="1400" dirty="0"/>
+          </a:p>
+        </p:txBody>
+      </p:sp>
+      <p:sp>
+        <p:nvSpPr>
+          <p:cNvPr id="7" name="Text 5"/>
+          <p:cNvSpPr/>
+          <p:nvPr/>
+        </p:nvSpPr>
+        <p:spPr>
+          <a:xfrm>
+            <a:off x="365760" y="2103120"/>
+            <a:ext cx="3383280" cy="4572000"/>
+          </a:xfrm>
+          <a:prstGeom prst="rect">
+            <a:avLst/>
+          </a:prstGeom>
+          <a:noFill/>
+          <a:ln/>
+        </p:spPr>
+        <p:txBody>
+          <a:bodyPr wrap="square" rtlCol="0" anchor="ctr"/>
+          <a:lstStyle/>
+          <a:p>
+            <a:pPr indent="0" marL="0">
+              <a:lnSpc>
+                <a:spcPct val="155000"/>
+              </a:lnSpc>
+              <a:buNone/>
+            </a:pPr>
+            <a:r>
+              <a:rPr lang="en-US" sz="1100" dirty="0">
+                <a:solidFill>
+                  <a:srgbClr val="C0C6D0"/>
+                </a:solidFill>
+              </a:rPr>
+              <a:t>Решение на платформе Loginom состоит из нескольких аналитических слоёв: ETL-слой для сбора и нормализации данных из кассовых систем, WMS и промо-планов; ML-слой для построения прогностических моделей с учётом сезонности, акций и региональных особенностей; модуль расчёта страховых запасов и товарных нормативов; REST API-интеграция с системой заказов и закупок. Благодаря готовым компонентам партнёра Reshape Analytics из маркетплейса Loginom значительная часть функциональности доступна «из коробки», что позволяет запустить рабочий прототип уже через 2–3 месяца после старта пилота.</a:t>
+            </a:r>
+            <a:endParaRPr lang="en-US" sz="1100" dirty="0"/>
+          </a:p>
+        </p:txBody>
+      </p:sp>
+      <p:sp>
+        <p:nvSpPr>
+          <p:cNvPr id="8" name="Shape 6"/>
+          <p:cNvSpPr/>
+          <p:nvPr/>
+        </p:nvSpPr>
+        <p:spPr>
+          <a:xfrm>
+            <a:off x="4434840" y="1115568"/>
+            <a:ext cx="3621024" cy="2706624"/>
+          </a:xfrm>
+          <a:prstGeom prst="rect">
+            <a:avLst/>
+          </a:prstGeom>
+          <a:solidFill>
+            <a:srgbClr val="F4F5F7"/>
           </a:solidFill>
           <a:ln w="12700">
             <a:solidFill>
-              <a:srgbClr val="D0D8E8"/>
+              <a:srgbClr val="E2E5EA"/>
             </a:solidFill>
             <a:prstDash val="solid"/>
           </a:ln>
@@ -2423,14 +2538,106 @@
       </p:sp>
       <p:sp>
         <p:nvSpPr>
-          <p:cNvPr id="5" name="Text 3"/>
-          <p:cNvSpPr/>
-          <p:nvPr/>
-        </p:nvSpPr>
-        <p:spPr>
-          <a:xfrm>
-            <a:off x="640080" y="1280160"/>
-            <a:ext cx="10972800" cy="4663440"/>
+          <p:cNvPr id="9" name="Shape 7"/>
+          <p:cNvSpPr/>
+          <p:nvPr/>
+        </p:nvSpPr>
+        <p:spPr>
+          <a:xfrm>
+            <a:off x="4434840" y="1115568"/>
+            <a:ext cx="3621024" cy="64008"/>
+          </a:xfrm>
+          <a:prstGeom prst="rect">
+            <a:avLst/>
+          </a:prstGeom>
+          <a:solidFill>
+            <a:srgbClr val="D4312A"/>
+          </a:solidFill>
+          <a:ln/>
+        </p:spPr>
+      </p:sp>
+      <p:sp>
+        <p:nvSpPr>
+          <p:cNvPr id="10" name="Text 8"/>
+          <p:cNvSpPr/>
+          <p:nvPr/>
+        </p:nvSpPr>
+        <p:spPr>
+          <a:xfrm>
+            <a:off x="4617720" y="1280160"/>
+            <a:ext cx="594360" cy="502920"/>
+          </a:xfrm>
+          <a:prstGeom prst="rect">
+            <a:avLst/>
+          </a:prstGeom>
+          <a:noFill/>
+          <a:ln/>
+        </p:spPr>
+        <p:txBody>
+          <a:bodyPr wrap="square" rtlCol="0" anchor="ctr"/>
+          <a:lstStyle/>
+          <a:p>
+            <a:pPr indent="0" marL="0">
+              <a:buNone/>
+            </a:pPr>
+            <a:r>
+              <a:rPr lang="en-US" sz="2200" b="1" dirty="0">
+                <a:solidFill>
+                  <a:srgbClr val="D4312A"/>
+                </a:solidFill>
+              </a:rPr>
+              <a:t>01</a:t>
+            </a:r>
+            <a:endParaRPr lang="en-US" sz="2200" dirty="0"/>
+          </a:p>
+        </p:txBody>
+      </p:sp>
+      <p:sp>
+        <p:nvSpPr>
+          <p:cNvPr id="11" name="Text 9"/>
+          <p:cNvSpPr/>
+          <p:nvPr/>
+        </p:nvSpPr>
+        <p:spPr>
+          <a:xfrm>
+            <a:off x="5349240" y="1280160"/>
+            <a:ext cx="2523744" cy="548640"/>
+          </a:xfrm>
+          <a:prstGeom prst="rect">
+            <a:avLst/>
+          </a:prstGeom>
+          <a:noFill/>
+          <a:ln/>
+        </p:spPr>
+        <p:txBody>
+          <a:bodyPr wrap="square" rtlCol="0" anchor="ctr"/>
+          <a:lstStyle/>
+          <a:p>
+            <a:pPr indent="0" marL="0">
+              <a:buNone/>
+            </a:pPr>
+            <a:r>
+              <a:rPr lang="en-US" sz="1200" b="1" dirty="0">
+                <a:solidFill>
+                  <a:srgbClr val="1E2433"/>
+                </a:solidFill>
+              </a:rPr>
+              <a:t>Интеграция источников данных</a:t>
+            </a:r>
+            <a:endParaRPr lang="en-US" sz="1200" dirty="0"/>
+          </a:p>
+        </p:txBody>
+      </p:sp>
+      <p:sp>
+        <p:nvSpPr>
+          <p:cNvPr id="12" name="Text 10"/>
+          <p:cNvSpPr/>
+          <p:nvPr/>
+        </p:nvSpPr>
+        <p:spPr>
+          <a:xfrm>
+            <a:off x="4617720" y="1920240"/>
+            <a:ext cx="3255264" cy="1746504"/>
           </a:xfrm>
           <a:prstGeom prst="rect">
             <a:avLst/>
@@ -2449,14 +2656,482 @@
               <a:buNone/>
             </a:pPr>
             <a:r>
-              <a:rPr lang="en-US" sz="1400" dirty="0">
-                <a:solidFill>
-                  <a:srgbClr val="1A1A2E"/>
-                </a:solidFill>
-              </a:rPr>
-              <a:t>ETL-пайплайн для сбора данных о продажах, остатках и поставках из ERP/WMS клиента → ML-модели прогнозирования спроса на базе Loginom (временные ряды, сезонность, промо-эффекты) → модуль оптимизации заказов с учётом сроков годности и страховых запасов → дашборд для категорийных менеджеров. Пилот: 1 регион, ~500–1000 магазинов, 3 месяца на разработку + 2 месяца на тестирование и доработку, 5 месяцев на тиражирование.</a:t>
-            </a:r>
-            <a:endParaRPr lang="en-US" sz="1400" dirty="0"/>
+              <a:rPr lang="en-US" sz="1100" dirty="0">
+                <a:solidFill>
+                  <a:srgbClr val="1E2433"/>
+                </a:solidFill>
+              </a:rPr>
+              <a:t>Подключение к кассовым системам, WMS, ERP и промо-планам пилотного региона. Предобработка и нормализация истории продаж, остатков, поставок. Настройка автоматического ETL-конвейера для ежедневного обновления данных.</a:t>
+            </a:r>
+            <a:endParaRPr lang="en-US" sz="1100" dirty="0"/>
+          </a:p>
+        </p:txBody>
+      </p:sp>
+      <p:sp>
+        <p:nvSpPr>
+          <p:cNvPr id="13" name="Shape 11"/>
+          <p:cNvSpPr/>
+          <p:nvPr/>
+        </p:nvSpPr>
+        <p:spPr>
+          <a:xfrm>
+            <a:off x="8220456" y="1115568"/>
+            <a:ext cx="3621024" cy="2706624"/>
+          </a:xfrm>
+          <a:prstGeom prst="rect">
+            <a:avLst/>
+          </a:prstGeom>
+          <a:solidFill>
+            <a:srgbClr val="F4F5F7"/>
+          </a:solidFill>
+          <a:ln w="12700">
+            <a:solidFill>
+              <a:srgbClr val="E2E5EA"/>
+            </a:solidFill>
+            <a:prstDash val="solid"/>
+          </a:ln>
+        </p:spPr>
+      </p:sp>
+      <p:sp>
+        <p:nvSpPr>
+          <p:cNvPr id="14" name="Shape 12"/>
+          <p:cNvSpPr/>
+          <p:nvPr/>
+        </p:nvSpPr>
+        <p:spPr>
+          <a:xfrm>
+            <a:off x="8220456" y="1115568"/>
+            <a:ext cx="3621024" cy="64008"/>
+          </a:xfrm>
+          <a:prstGeom prst="rect">
+            <a:avLst/>
+          </a:prstGeom>
+          <a:solidFill>
+            <a:srgbClr val="D4312A"/>
+          </a:solidFill>
+          <a:ln/>
+        </p:spPr>
+      </p:sp>
+      <p:sp>
+        <p:nvSpPr>
+          <p:cNvPr id="15" name="Text 13"/>
+          <p:cNvSpPr/>
+          <p:nvPr/>
+        </p:nvSpPr>
+        <p:spPr>
+          <a:xfrm>
+            <a:off x="8403336" y="1280160"/>
+            <a:ext cx="594360" cy="502920"/>
+          </a:xfrm>
+          <a:prstGeom prst="rect">
+            <a:avLst/>
+          </a:prstGeom>
+          <a:noFill/>
+          <a:ln/>
+        </p:spPr>
+        <p:txBody>
+          <a:bodyPr wrap="square" rtlCol="0" anchor="ctr"/>
+          <a:lstStyle/>
+          <a:p>
+            <a:pPr indent="0" marL="0">
+              <a:buNone/>
+            </a:pPr>
+            <a:r>
+              <a:rPr lang="en-US" sz="2200" b="1" dirty="0">
+                <a:solidFill>
+                  <a:srgbClr val="D4312A"/>
+                </a:solidFill>
+              </a:rPr>
+              <a:t>02</a:t>
+            </a:r>
+            <a:endParaRPr lang="en-US" sz="2200" dirty="0"/>
+          </a:p>
+        </p:txBody>
+      </p:sp>
+      <p:sp>
+        <p:nvSpPr>
+          <p:cNvPr id="16" name="Text 14"/>
+          <p:cNvSpPr/>
+          <p:nvPr/>
+        </p:nvSpPr>
+        <p:spPr>
+          <a:xfrm>
+            <a:off x="9134856" y="1280160"/>
+            <a:ext cx="2523744" cy="548640"/>
+          </a:xfrm>
+          <a:prstGeom prst="rect">
+            <a:avLst/>
+          </a:prstGeom>
+          <a:noFill/>
+          <a:ln/>
+        </p:spPr>
+        <p:txBody>
+          <a:bodyPr wrap="square" rtlCol="0" anchor="ctr"/>
+          <a:lstStyle/>
+          <a:p>
+            <a:pPr indent="0" marL="0">
+              <a:buNone/>
+            </a:pPr>
+            <a:r>
+              <a:rPr lang="en-US" sz="1200" b="1" dirty="0">
+                <a:solidFill>
+                  <a:srgbClr val="1E2433"/>
+                </a:solidFill>
+              </a:rPr>
+              <a:t>Разработка прогностических моделей</a:t>
+            </a:r>
+            <a:endParaRPr lang="en-US" sz="1200" dirty="0"/>
+          </a:p>
+        </p:txBody>
+      </p:sp>
+      <p:sp>
+        <p:nvSpPr>
+          <p:cNvPr id="17" name="Text 15"/>
+          <p:cNvSpPr/>
+          <p:nvPr/>
+        </p:nvSpPr>
+        <p:spPr>
+          <a:xfrm>
+            <a:off x="8403336" y="1920240"/>
+            <a:ext cx="3255264" cy="1746504"/>
+          </a:xfrm>
+          <a:prstGeom prst="rect">
+            <a:avLst/>
+          </a:prstGeom>
+          <a:noFill/>
+          <a:ln/>
+        </p:spPr>
+        <p:txBody>
+          <a:bodyPr wrap="square" rtlCol="0" anchor="ctr"/>
+          <a:lstStyle/>
+          <a:p>
+            <a:pPr indent="0" marL="0">
+              <a:lnSpc>
+                <a:spcPct val="140000"/>
+              </a:lnSpc>
+              <a:buNone/>
+            </a:pPr>
+            <a:r>
+              <a:rPr lang="en-US" sz="1100" dirty="0">
+                <a:solidFill>
+                  <a:srgbClr val="1E2433"/>
+                </a:solidFill>
+              </a:rPr>
+              <a:t>Построение ML-моделей прогнозирования спроса с учётом сезонности, событийных и промо-факторов. Автоматический выбор лучшей прогностической модели для каждой товарной группы. Валидация точности прогноза на исторических данных.</a:t>
+            </a:r>
+            <a:endParaRPr lang="en-US" sz="1100" dirty="0"/>
+          </a:p>
+        </p:txBody>
+      </p:sp>
+      <p:sp>
+        <p:nvSpPr>
+          <p:cNvPr id="18" name="Shape 16"/>
+          <p:cNvSpPr/>
+          <p:nvPr/>
+        </p:nvSpPr>
+        <p:spPr>
+          <a:xfrm>
+            <a:off x="4434840" y="3986784"/>
+            <a:ext cx="3621024" cy="2706624"/>
+          </a:xfrm>
+          <a:prstGeom prst="rect">
+            <a:avLst/>
+          </a:prstGeom>
+          <a:solidFill>
+            <a:srgbClr val="F4F5F7"/>
+          </a:solidFill>
+          <a:ln w="12700">
+            <a:solidFill>
+              <a:srgbClr val="E2E5EA"/>
+            </a:solidFill>
+            <a:prstDash val="solid"/>
+          </a:ln>
+        </p:spPr>
+      </p:sp>
+      <p:sp>
+        <p:nvSpPr>
+          <p:cNvPr id="19" name="Shape 17"/>
+          <p:cNvSpPr/>
+          <p:nvPr/>
+        </p:nvSpPr>
+        <p:spPr>
+          <a:xfrm>
+            <a:off x="4434840" y="3986784"/>
+            <a:ext cx="3621024" cy="64008"/>
+          </a:xfrm>
+          <a:prstGeom prst="rect">
+            <a:avLst/>
+          </a:prstGeom>
+          <a:solidFill>
+            <a:srgbClr val="D4312A"/>
+          </a:solidFill>
+          <a:ln/>
+        </p:spPr>
+      </p:sp>
+      <p:sp>
+        <p:nvSpPr>
+          <p:cNvPr id="20" name="Text 18"/>
+          <p:cNvSpPr/>
+          <p:nvPr/>
+        </p:nvSpPr>
+        <p:spPr>
+          <a:xfrm>
+            <a:off x="4617720" y="4151376"/>
+            <a:ext cx="594360" cy="502920"/>
+          </a:xfrm>
+          <a:prstGeom prst="rect">
+            <a:avLst/>
+          </a:prstGeom>
+          <a:noFill/>
+          <a:ln/>
+        </p:spPr>
+        <p:txBody>
+          <a:bodyPr wrap="square" rtlCol="0" anchor="ctr"/>
+          <a:lstStyle/>
+          <a:p>
+            <a:pPr indent="0" marL="0">
+              <a:buNone/>
+            </a:pPr>
+            <a:r>
+              <a:rPr lang="en-US" sz="2200" b="1" dirty="0">
+                <a:solidFill>
+                  <a:srgbClr val="D4312A"/>
+                </a:solidFill>
+              </a:rPr>
+              <a:t>03</a:t>
+            </a:r>
+            <a:endParaRPr lang="en-US" sz="2200" dirty="0"/>
+          </a:p>
+        </p:txBody>
+      </p:sp>
+      <p:sp>
+        <p:nvSpPr>
+          <p:cNvPr id="21" name="Text 19"/>
+          <p:cNvSpPr/>
+          <p:nvPr/>
+        </p:nvSpPr>
+        <p:spPr>
+          <a:xfrm>
+            <a:off x="5349240" y="4151376"/>
+            <a:ext cx="2523744" cy="548640"/>
+          </a:xfrm>
+          <a:prstGeom prst="rect">
+            <a:avLst/>
+          </a:prstGeom>
+          <a:noFill/>
+          <a:ln/>
+        </p:spPr>
+        <p:txBody>
+          <a:bodyPr wrap="square" rtlCol="0" anchor="ctr"/>
+          <a:lstStyle/>
+          <a:p>
+            <a:pPr indent="0" marL="0">
+              <a:buNone/>
+            </a:pPr>
+            <a:r>
+              <a:rPr lang="en-US" sz="1200" b="1" dirty="0">
+                <a:solidFill>
+                  <a:srgbClr val="1E2433"/>
+                </a:solidFill>
+              </a:rPr>
+              <a:t>Оптимизация запасов и рекомендации</a:t>
+            </a:r>
+            <a:endParaRPr lang="en-US" sz="1200" dirty="0"/>
+          </a:p>
+        </p:txBody>
+      </p:sp>
+      <p:sp>
+        <p:nvSpPr>
+          <p:cNvPr id="22" name="Text 20"/>
+          <p:cNvSpPr/>
+          <p:nvPr/>
+        </p:nvSpPr>
+        <p:spPr>
+          <a:xfrm>
+            <a:off x="4617720" y="4791456"/>
+            <a:ext cx="3255264" cy="1746504"/>
+          </a:xfrm>
+          <a:prstGeom prst="rect">
+            <a:avLst/>
+          </a:prstGeom>
+          <a:noFill/>
+          <a:ln/>
+        </p:spPr>
+        <p:txBody>
+          <a:bodyPr wrap="square" rtlCol="0" anchor="ctr"/>
+          <a:lstStyle/>
+          <a:p>
+            <a:pPr indent="0" marL="0">
+              <a:lnSpc>
+                <a:spcPct val="140000"/>
+              </a:lnSpc>
+              <a:buNone/>
+            </a:pPr>
+            <a:r>
+              <a:rPr lang="en-US" sz="1100" dirty="0">
+                <a:solidFill>
+                  <a:srgbClr val="1E2433"/>
+                </a:solidFill>
+              </a:rPr>
+              <a:t>Расчёт оптимальных товарных нормативов, страховых запасов и рекомендаций по пополнению в разрезе магазин–SKU. Интеграция результатов расчётов с системой формирования заказов через REST API.</a:t>
+            </a:r>
+            <a:endParaRPr lang="en-US" sz="1100" dirty="0"/>
+          </a:p>
+        </p:txBody>
+      </p:sp>
+      <p:sp>
+        <p:nvSpPr>
+          <p:cNvPr id="23" name="Shape 21"/>
+          <p:cNvSpPr/>
+          <p:nvPr/>
+        </p:nvSpPr>
+        <p:spPr>
+          <a:xfrm>
+            <a:off x="8220456" y="3986784"/>
+            <a:ext cx="3621024" cy="2706624"/>
+          </a:xfrm>
+          <a:prstGeom prst="rect">
+            <a:avLst/>
+          </a:prstGeom>
+          <a:solidFill>
+            <a:srgbClr val="F4F5F7"/>
+          </a:solidFill>
+          <a:ln w="12700">
+            <a:solidFill>
+              <a:srgbClr val="E2E5EA"/>
+            </a:solidFill>
+            <a:prstDash val="solid"/>
+          </a:ln>
+        </p:spPr>
+      </p:sp>
+      <p:sp>
+        <p:nvSpPr>
+          <p:cNvPr id="24" name="Shape 22"/>
+          <p:cNvSpPr/>
+          <p:nvPr/>
+        </p:nvSpPr>
+        <p:spPr>
+          <a:xfrm>
+            <a:off x="8220456" y="3986784"/>
+            <a:ext cx="3621024" cy="64008"/>
+          </a:xfrm>
+          <a:prstGeom prst="rect">
+            <a:avLst/>
+          </a:prstGeom>
+          <a:solidFill>
+            <a:srgbClr val="D4312A"/>
+          </a:solidFill>
+          <a:ln/>
+        </p:spPr>
+      </p:sp>
+      <p:sp>
+        <p:nvSpPr>
+          <p:cNvPr id="25" name="Text 23"/>
+          <p:cNvSpPr/>
+          <p:nvPr/>
+        </p:nvSpPr>
+        <p:spPr>
+          <a:xfrm>
+            <a:off x="8403336" y="4151376"/>
+            <a:ext cx="594360" cy="502920"/>
+          </a:xfrm>
+          <a:prstGeom prst="rect">
+            <a:avLst/>
+          </a:prstGeom>
+          <a:noFill/>
+          <a:ln/>
+        </p:spPr>
+        <p:txBody>
+          <a:bodyPr wrap="square" rtlCol="0" anchor="ctr"/>
+          <a:lstStyle/>
+          <a:p>
+            <a:pPr indent="0" marL="0">
+              <a:buNone/>
+            </a:pPr>
+            <a:r>
+              <a:rPr lang="en-US" sz="2200" b="1" dirty="0">
+                <a:solidFill>
+                  <a:srgbClr val="D4312A"/>
+                </a:solidFill>
+              </a:rPr>
+              <a:t>04</a:t>
+            </a:r>
+            <a:endParaRPr lang="en-US" sz="2200" dirty="0"/>
+          </a:p>
+        </p:txBody>
+      </p:sp>
+      <p:sp>
+        <p:nvSpPr>
+          <p:cNvPr id="26" name="Text 24"/>
+          <p:cNvSpPr/>
+          <p:nvPr/>
+        </p:nvSpPr>
+        <p:spPr>
+          <a:xfrm>
+            <a:off x="9134856" y="4151376"/>
+            <a:ext cx="2523744" cy="548640"/>
+          </a:xfrm>
+          <a:prstGeom prst="rect">
+            <a:avLst/>
+          </a:prstGeom>
+          <a:noFill/>
+          <a:ln/>
+        </p:spPr>
+        <p:txBody>
+          <a:bodyPr wrap="square" rtlCol="0" anchor="ctr"/>
+          <a:lstStyle/>
+          <a:p>
+            <a:pPr indent="0" marL="0">
+              <a:buNone/>
+            </a:pPr>
+            <a:r>
+              <a:rPr lang="en-US" sz="1200" b="1" dirty="0">
+                <a:solidFill>
+                  <a:srgbClr val="1E2433"/>
+                </a:solidFill>
+              </a:rPr>
+              <a:t>Пилот и оценка ROI</a:t>
+            </a:r>
+            <a:endParaRPr lang="en-US" sz="1200" dirty="0"/>
+          </a:p>
+        </p:txBody>
+      </p:sp>
+      <p:sp>
+        <p:nvSpPr>
+          <p:cNvPr id="27" name="Text 25"/>
+          <p:cNvSpPr/>
+          <p:nvPr/>
+        </p:nvSpPr>
+        <p:spPr>
+          <a:xfrm>
+            <a:off x="8403336" y="4791456"/>
+            <a:ext cx="3255264" cy="1746504"/>
+          </a:xfrm>
+          <a:prstGeom prst="rect">
+            <a:avLst/>
+          </a:prstGeom>
+          <a:noFill/>
+          <a:ln/>
+        </p:spPr>
+        <p:txBody>
+          <a:bodyPr wrap="square" rtlCol="0" anchor="ctr"/>
+          <a:lstStyle/>
+          <a:p>
+            <a:pPr indent="0" marL="0">
+              <a:lnSpc>
+                <a:spcPct val="140000"/>
+              </a:lnSpc>
+              <a:buNone/>
+            </a:pPr>
+            <a:r>
+              <a:rPr lang="en-US" sz="1100" dirty="0">
+                <a:solidFill>
+                  <a:srgbClr val="1E2433"/>
+                </a:solidFill>
+              </a:rPr>
+              <a:t>Запуск системы в боевом режиме на пилотном регионе. Мониторинг ключевых метрик: снижение % списаний скоропортящихся товаров, снижение % out-of-stock. Расчёт экономического эффекта и подготовка бизнес-кейса для тиражирования на всю сеть.</a:t>
+            </a:r>
+            <a:endParaRPr lang="en-US" sz="1100" dirty="0"/>
           </a:p>
         </p:txBody>
       </p:sp>
@@ -2500,7 +3175,7 @@
             <a:avLst/>
           </a:prstGeom>
           <a:solidFill>
-            <a:srgbClr val="1A56A0"/>
+            <a:srgbClr val="1E2433"/>
           </a:solidFill>
           <a:ln/>
         </p:spPr>
@@ -2549,8 +3224,28 @@
         </p:nvSpPr>
         <p:spPr>
           <a:xfrm>
-            <a:off x="365760" y="1188720"/>
-            <a:ext cx="5577840" cy="1005840"/>
+            <a:off x="0" y="1005840"/>
+            <a:ext cx="12192000" cy="5852160"/>
+          </a:xfrm>
+          <a:prstGeom prst="rect">
+            <a:avLst/>
+          </a:prstGeom>
+          <a:solidFill>
+            <a:srgbClr val="F4F5F7"/>
+          </a:solidFill>
+          <a:ln/>
+        </p:spPr>
+      </p:sp>
+      <p:sp>
+        <p:nvSpPr>
+          <p:cNvPr id="5" name="Shape 3"/>
+          <p:cNvSpPr/>
+          <p:nvPr/>
+        </p:nvSpPr>
+        <p:spPr>
+          <a:xfrm>
+            <a:off x="457200" y="1188720"/>
+            <a:ext cx="11247120" cy="987552"/>
           </a:xfrm>
           <a:prstGeom prst="rect">
             <a:avLst/>
@@ -2560,7 +3255,7 @@
           </a:solidFill>
           <a:ln w="12700">
             <a:solidFill>
-              <a:srgbClr val="D0D8E8"/>
+              <a:srgbClr val="E8EAED"/>
             </a:solidFill>
             <a:prstDash val="solid"/>
           </a:ln>
@@ -2568,34 +3263,54 @@
       </p:sp>
       <p:sp>
         <p:nvSpPr>
-          <p:cNvPr id="5" name="Shape 3"/>
-          <p:cNvSpPr/>
-          <p:nvPr/>
-        </p:nvSpPr>
-        <p:spPr>
-          <a:xfrm>
-            <a:off x="365760" y="1188720"/>
-            <a:ext cx="411480" cy="1005840"/>
-          </a:xfrm>
-          <a:prstGeom prst="rect">
-            <a:avLst/>
-          </a:prstGeom>
-          <a:solidFill>
-            <a:srgbClr val="1A56A0"/>
-          </a:solidFill>
-          <a:ln/>
-        </p:spPr>
-      </p:sp>
-      <p:sp>
-        <p:nvSpPr>
-          <p:cNvPr id="6" name="Text 4"/>
-          <p:cNvSpPr/>
-          <p:nvPr/>
-        </p:nvSpPr>
-        <p:spPr>
-          <a:xfrm>
-            <a:off x="365760" y="1188720"/>
-            <a:ext cx="411480" cy="1005840"/>
+          <p:cNvPr id="6" name="Shape 4"/>
+          <p:cNvSpPr/>
+          <p:nvPr/>
+        </p:nvSpPr>
+        <p:spPr>
+          <a:xfrm>
+            <a:off x="457200" y="1188720"/>
+            <a:ext cx="64008" cy="987552"/>
+          </a:xfrm>
+          <a:prstGeom prst="rect">
+            <a:avLst/>
+          </a:prstGeom>
+          <a:solidFill>
+            <a:srgbClr val="D4312A"/>
+          </a:solidFill>
+          <a:ln/>
+        </p:spPr>
+      </p:sp>
+      <p:sp>
+        <p:nvSpPr>
+          <p:cNvPr id="7" name="Shape 5"/>
+          <p:cNvSpPr/>
+          <p:nvPr/>
+        </p:nvSpPr>
+        <p:spPr>
+          <a:xfrm>
+            <a:off x="704088" y="1362456"/>
+            <a:ext cx="640080" cy="640080"/>
+          </a:xfrm>
+          <a:prstGeom prst="rect">
+            <a:avLst/>
+          </a:prstGeom>
+          <a:solidFill>
+            <a:srgbClr val="1E2433"/>
+          </a:solidFill>
+          <a:ln/>
+        </p:spPr>
+      </p:sp>
+      <p:sp>
+        <p:nvSpPr>
+          <p:cNvPr id="8" name="Text 6"/>
+          <p:cNvSpPr/>
+          <p:nvPr/>
+        </p:nvSpPr>
+        <p:spPr>
+          <a:xfrm>
+            <a:off x="704088" y="1362456"/>
+            <a:ext cx="640080" cy="640080"/>
           </a:xfrm>
           <a:prstGeom prst="rect">
             <a:avLst/>
@@ -2611,27 +3326,27 @@
               <a:buNone/>
             </a:pPr>
             <a:r>
-              <a:rPr lang="en-US" sz="1800" b="1" dirty="0">
-                <a:solidFill>
-                  <a:srgbClr val="FFFFFF"/>
-                </a:solidFill>
-              </a:rPr>
-              <a:t>1</a:t>
-            </a:r>
-            <a:endParaRPr lang="en-US" sz="1800" dirty="0"/>
-          </a:p>
-        </p:txBody>
-      </p:sp>
-      <p:sp>
-        <p:nvSpPr>
-          <p:cNvPr id="7" name="Text 5"/>
-          <p:cNvSpPr/>
-          <p:nvPr/>
-        </p:nvSpPr>
-        <p:spPr>
-          <a:xfrm>
-            <a:off x="914400" y="1280160"/>
-            <a:ext cx="4892040" cy="822960"/>
+              <a:rPr lang="en-US" sz="1400" b="1" dirty="0">
+                <a:solidFill>
+                  <a:srgbClr val="D4312A"/>
+                </a:solidFill>
+              </a:rPr>
+              <a:t>01</a:t>
+            </a:r>
+            <a:endParaRPr lang="en-US" sz="1400" dirty="0"/>
+          </a:p>
+        </p:txBody>
+      </p:sp>
+      <p:sp>
+        <p:nvSpPr>
+          <p:cNvPr id="9" name="Text 7"/>
+          <p:cNvSpPr/>
+          <p:nvPr/>
+        </p:nvSpPr>
+        <p:spPr>
+          <a:xfrm>
+            <a:off x="1508760" y="1271016"/>
+            <a:ext cx="10058400" cy="822960"/>
           </a:xfrm>
           <a:prstGeom prst="rect">
             <a:avLst/>
@@ -2649,10 +3364,10 @@
             <a:r>
               <a:rPr lang="en-US" sz="1300" dirty="0">
                 <a:solidFill>
-                  <a:srgbClr val="1A1A2E"/>
-                </a:solidFill>
-              </a:rPr>
-              <a:t>Loginom имеет готовые решения «Прогнозирование спроса» и «Оптимизация запасов» из коробки — прямое попадание в задачу клиента</a:t>
+                  <a:srgbClr val="1E2433"/>
+                </a:solidFill>
+              </a:rPr>
+              <a:t>Готовые компоненты Loginom для прогнозирования спроса, оптимизации и расчёта страховых запасов — ключевые функции запрошенной системы реализуются из коробки.</a:t>
             </a:r>
             <a:endParaRPr lang="en-US" sz="1300" dirty="0"/>
           </a:p>
@@ -2660,14 +3375,14 @@
       </p:sp>
       <p:sp>
         <p:nvSpPr>
-          <p:cNvPr id="8" name="Shape 6"/>
-          <p:cNvSpPr/>
-          <p:nvPr/>
-        </p:nvSpPr>
-        <p:spPr>
-          <a:xfrm>
-            <a:off x="365760" y="2377440"/>
-            <a:ext cx="5577840" cy="1005840"/>
+          <p:cNvPr id="10" name="Shape 8"/>
+          <p:cNvSpPr/>
+          <p:nvPr/>
+        </p:nvSpPr>
+        <p:spPr>
+          <a:xfrm>
+            <a:off x="457200" y="2286000"/>
+            <a:ext cx="11247120" cy="987552"/>
           </a:xfrm>
           <a:prstGeom prst="rect">
             <a:avLst/>
@@ -2677,7 +3392,7 @@
           </a:solidFill>
           <a:ln w="12700">
             <a:solidFill>
-              <a:srgbClr val="D0D8E8"/>
+              <a:srgbClr val="E8EAED"/>
             </a:solidFill>
             <a:prstDash val="solid"/>
           </a:ln>
@@ -2685,34 +3400,54 @@
       </p:sp>
       <p:sp>
         <p:nvSpPr>
-          <p:cNvPr id="9" name="Shape 7"/>
-          <p:cNvSpPr/>
-          <p:nvPr/>
-        </p:nvSpPr>
-        <p:spPr>
-          <a:xfrm>
-            <a:off x="365760" y="2377440"/>
-            <a:ext cx="411480" cy="1005840"/>
-          </a:xfrm>
-          <a:prstGeom prst="rect">
-            <a:avLst/>
-          </a:prstGeom>
-          <a:solidFill>
-            <a:srgbClr val="1A56A0"/>
-          </a:solidFill>
-          <a:ln/>
-        </p:spPr>
-      </p:sp>
-      <p:sp>
-        <p:nvSpPr>
-          <p:cNvPr id="10" name="Text 8"/>
-          <p:cNvSpPr/>
-          <p:nvPr/>
-        </p:nvSpPr>
-        <p:spPr>
-          <a:xfrm>
-            <a:off x="365760" y="2377440"/>
-            <a:ext cx="411480" cy="1005840"/>
+          <p:cNvPr id="11" name="Shape 9"/>
+          <p:cNvSpPr/>
+          <p:nvPr/>
+        </p:nvSpPr>
+        <p:spPr>
+          <a:xfrm>
+            <a:off x="457200" y="2286000"/>
+            <a:ext cx="64008" cy="987552"/>
+          </a:xfrm>
+          <a:prstGeom prst="rect">
+            <a:avLst/>
+          </a:prstGeom>
+          <a:solidFill>
+            <a:srgbClr val="D4312A"/>
+          </a:solidFill>
+          <a:ln/>
+        </p:spPr>
+      </p:sp>
+      <p:sp>
+        <p:nvSpPr>
+          <p:cNvPr id="12" name="Shape 10"/>
+          <p:cNvSpPr/>
+          <p:nvPr/>
+        </p:nvSpPr>
+        <p:spPr>
+          <a:xfrm>
+            <a:off x="704088" y="2459736"/>
+            <a:ext cx="640080" cy="640080"/>
+          </a:xfrm>
+          <a:prstGeom prst="rect">
+            <a:avLst/>
+          </a:prstGeom>
+          <a:solidFill>
+            <a:srgbClr val="1E2433"/>
+          </a:solidFill>
+          <a:ln/>
+        </p:spPr>
+      </p:sp>
+      <p:sp>
+        <p:nvSpPr>
+          <p:cNvPr id="13" name="Text 11"/>
+          <p:cNvSpPr/>
+          <p:nvPr/>
+        </p:nvSpPr>
+        <p:spPr>
+          <a:xfrm>
+            <a:off x="704088" y="2459736"/>
+            <a:ext cx="640080" cy="640080"/>
           </a:xfrm>
           <a:prstGeom prst="rect">
             <a:avLst/>
@@ -2728,27 +3463,27 @@
               <a:buNone/>
             </a:pPr>
             <a:r>
-              <a:rPr lang="en-US" sz="1800" b="1" dirty="0">
-                <a:solidFill>
-                  <a:srgbClr val="FFFFFF"/>
-                </a:solidFill>
-              </a:rPr>
-              <a:t>2</a:t>
-            </a:r>
-            <a:endParaRPr lang="en-US" sz="1800" dirty="0"/>
-          </a:p>
-        </p:txBody>
-      </p:sp>
-      <p:sp>
-        <p:nvSpPr>
-          <p:cNvPr id="11" name="Text 9"/>
-          <p:cNvSpPr/>
-          <p:nvPr/>
-        </p:nvSpPr>
-        <p:spPr>
-          <a:xfrm>
-            <a:off x="914400" y="2468880"/>
-            <a:ext cx="4892040" cy="822960"/>
+              <a:rPr lang="en-US" sz="1400" b="1" dirty="0">
+                <a:solidFill>
+                  <a:srgbClr val="D4312A"/>
+                </a:solidFill>
+              </a:rPr>
+              <a:t>02</a:t>
+            </a:r>
+            <a:endParaRPr lang="en-US" sz="1400" dirty="0"/>
+          </a:p>
+        </p:txBody>
+      </p:sp>
+      <p:sp>
+        <p:nvSpPr>
+          <p:cNvPr id="14" name="Text 12"/>
+          <p:cNvSpPr/>
+          <p:nvPr/>
+        </p:nvSpPr>
+        <p:spPr>
+          <a:xfrm>
+            <a:off x="1508760" y="2368296"/>
+            <a:ext cx="10058400" cy="822960"/>
           </a:xfrm>
           <a:prstGeom prst="rect">
             <a:avLst/>
@@ -2766,10 +3501,10 @@
             <a:r>
               <a:rPr lang="en-US" sz="1300" dirty="0">
                 <a:solidFill>
-                  <a:srgbClr val="1A1A2E"/>
-                </a:solidFill>
-              </a:rPr>
-              <a:t>Среди клиентов Loginom — крупные ритейлеры (X5 Retail Group, Hoff, Ситилинк), подтверждённая отраслевая экспертиза</a:t>
+                  <a:srgbClr val="1E2433"/>
+                </a:solidFill>
+              </a:rPr>
+              <a:t>Доказанный опыт в крупном ритейле: Hoff (интегрированное планирование + управление запасами), SUNLIGHT (управление запасами 50 000+ SKU), Estée Lauder (автоматизация прогнозирования розничных продаж).</a:t>
             </a:r>
             <a:endParaRPr lang="en-US" sz="1300" dirty="0"/>
           </a:p>
@@ -2777,14 +3512,14 @@
       </p:sp>
       <p:sp>
         <p:nvSpPr>
-          <p:cNvPr id="12" name="Shape 10"/>
-          <p:cNvSpPr/>
-          <p:nvPr/>
-        </p:nvSpPr>
-        <p:spPr>
-          <a:xfrm>
-            <a:off x="365760" y="3566160"/>
-            <a:ext cx="5577840" cy="1005840"/>
+          <p:cNvPr id="15" name="Shape 13"/>
+          <p:cNvSpPr/>
+          <p:nvPr/>
+        </p:nvSpPr>
+        <p:spPr>
+          <a:xfrm>
+            <a:off x="457200" y="3383280"/>
+            <a:ext cx="11247120" cy="987552"/>
           </a:xfrm>
           <a:prstGeom prst="rect">
             <a:avLst/>
@@ -2794,7 +3529,7 @@
           </a:solidFill>
           <a:ln w="12700">
             <a:solidFill>
-              <a:srgbClr val="D0D8E8"/>
+              <a:srgbClr val="E8EAED"/>
             </a:solidFill>
             <a:prstDash val="solid"/>
           </a:ln>
@@ -2802,34 +3537,54 @@
       </p:sp>
       <p:sp>
         <p:nvSpPr>
-          <p:cNvPr id="13" name="Shape 11"/>
-          <p:cNvSpPr/>
-          <p:nvPr/>
-        </p:nvSpPr>
-        <p:spPr>
-          <a:xfrm>
-            <a:off x="365760" y="3566160"/>
-            <a:ext cx="411480" cy="1005840"/>
-          </a:xfrm>
-          <a:prstGeom prst="rect">
-            <a:avLst/>
-          </a:prstGeom>
-          <a:solidFill>
-            <a:srgbClr val="1A56A0"/>
-          </a:solidFill>
-          <a:ln/>
-        </p:spPr>
-      </p:sp>
-      <p:sp>
-        <p:nvSpPr>
-          <p:cNvPr id="14" name="Text 12"/>
-          <p:cNvSpPr/>
-          <p:nvPr/>
-        </p:nvSpPr>
-        <p:spPr>
-          <a:xfrm>
-            <a:off x="365760" y="3566160"/>
-            <a:ext cx="411480" cy="1005840"/>
+          <p:cNvPr id="16" name="Shape 14"/>
+          <p:cNvSpPr/>
+          <p:nvPr/>
+        </p:nvSpPr>
+        <p:spPr>
+          <a:xfrm>
+            <a:off x="457200" y="3383280"/>
+            <a:ext cx="64008" cy="987552"/>
+          </a:xfrm>
+          <a:prstGeom prst="rect">
+            <a:avLst/>
+          </a:prstGeom>
+          <a:solidFill>
+            <a:srgbClr val="D4312A"/>
+          </a:solidFill>
+          <a:ln/>
+        </p:spPr>
+      </p:sp>
+      <p:sp>
+        <p:nvSpPr>
+          <p:cNvPr id="17" name="Shape 15"/>
+          <p:cNvSpPr/>
+          <p:nvPr/>
+        </p:nvSpPr>
+        <p:spPr>
+          <a:xfrm>
+            <a:off x="704088" y="3557016"/>
+            <a:ext cx="640080" cy="640080"/>
+          </a:xfrm>
+          <a:prstGeom prst="rect">
+            <a:avLst/>
+          </a:prstGeom>
+          <a:solidFill>
+            <a:srgbClr val="1E2433"/>
+          </a:solidFill>
+          <a:ln/>
+        </p:spPr>
+      </p:sp>
+      <p:sp>
+        <p:nvSpPr>
+          <p:cNvPr id="18" name="Text 16"/>
+          <p:cNvSpPr/>
+          <p:nvPr/>
+        </p:nvSpPr>
+        <p:spPr>
+          <a:xfrm>
+            <a:off x="704088" y="3557016"/>
+            <a:ext cx="640080" cy="640080"/>
           </a:xfrm>
           <a:prstGeom prst="rect">
             <a:avLst/>
@@ -2845,27 +3600,27 @@
               <a:buNone/>
             </a:pPr>
             <a:r>
-              <a:rPr lang="en-US" sz="1800" b="1" dirty="0">
-                <a:solidFill>
-                  <a:srgbClr val="FFFFFF"/>
-                </a:solidFill>
-              </a:rPr>
-              <a:t>3</a:t>
-            </a:r>
-            <a:endParaRPr lang="en-US" sz="1800" dirty="0"/>
-          </a:p>
-        </p:txBody>
-      </p:sp>
-      <p:sp>
-        <p:nvSpPr>
-          <p:cNvPr id="15" name="Text 13"/>
-          <p:cNvSpPr/>
-          <p:nvPr/>
-        </p:nvSpPr>
-        <p:spPr>
-          <a:xfrm>
-            <a:off x="914400" y="3657600"/>
-            <a:ext cx="4892040" cy="822960"/>
+              <a:rPr lang="en-US" sz="1400" b="1" dirty="0">
+                <a:solidFill>
+                  <a:srgbClr val="D4312A"/>
+                </a:solidFill>
+              </a:rPr>
+              <a:t>03</a:t>
+            </a:r>
+            <a:endParaRPr lang="en-US" sz="1400" dirty="0"/>
+          </a:p>
+        </p:txBody>
+      </p:sp>
+      <p:sp>
+        <p:nvSpPr>
+          <p:cNvPr id="19" name="Text 17"/>
+          <p:cNvSpPr/>
+          <p:nvPr/>
+        </p:nvSpPr>
+        <p:spPr>
+          <a:xfrm>
+            <a:off x="1508760" y="3465576"/>
+            <a:ext cx="10058400" cy="822960"/>
           </a:xfrm>
           <a:prstGeom prst="rect">
             <a:avLst/>
@@ -2883,10 +3638,10 @@
             <a:r>
               <a:rPr lang="en-US" sz="1300" dirty="0">
                 <a:solidFill>
-                  <a:srgbClr val="1A1A2E"/>
-                </a:solidFill>
-              </a:rPr>
-              <a:t>Low-code платформа позволяет быстро адаптировать модели под специфику Магнита без переписывания с нуля</a:t>
+                  <a:srgbClr val="1E2433"/>
+                </a:solidFill>
+              </a:rPr>
+              <a:t>Платформа обрабатывает большие массивы данных без колоссальных вычислительных мощностей, что критично при работе с данными сети 29 000 магазинов.</a:t>
             </a:r>
             <a:endParaRPr lang="en-US" sz="1300" dirty="0"/>
           </a:p>
@@ -2894,14 +3649,14 @@
       </p:sp>
       <p:sp>
         <p:nvSpPr>
-          <p:cNvPr id="16" name="Shape 14"/>
-          <p:cNvSpPr/>
-          <p:nvPr/>
-        </p:nvSpPr>
-        <p:spPr>
-          <a:xfrm>
-            <a:off x="6400800" y="1188720"/>
-            <a:ext cx="5577840" cy="1005840"/>
+          <p:cNvPr id="20" name="Shape 18"/>
+          <p:cNvSpPr/>
+          <p:nvPr/>
+        </p:nvSpPr>
+        <p:spPr>
+          <a:xfrm>
+            <a:off x="457200" y="4480560"/>
+            <a:ext cx="11247120" cy="987552"/>
           </a:xfrm>
           <a:prstGeom prst="rect">
             <a:avLst/>
@@ -2911,7 +3666,7 @@
           </a:solidFill>
           <a:ln w="12700">
             <a:solidFill>
-              <a:srgbClr val="D0D8E8"/>
+              <a:srgbClr val="E8EAED"/>
             </a:solidFill>
             <a:prstDash val="solid"/>
           </a:ln>
@@ -2919,34 +3674,54 @@
       </p:sp>
       <p:sp>
         <p:nvSpPr>
-          <p:cNvPr id="17" name="Shape 15"/>
-          <p:cNvSpPr/>
-          <p:nvPr/>
-        </p:nvSpPr>
-        <p:spPr>
-          <a:xfrm>
-            <a:off x="6400800" y="1188720"/>
-            <a:ext cx="411480" cy="1005840"/>
-          </a:xfrm>
-          <a:prstGeom prst="rect">
-            <a:avLst/>
-          </a:prstGeom>
-          <a:solidFill>
-            <a:srgbClr val="1A56A0"/>
-          </a:solidFill>
-          <a:ln/>
-        </p:spPr>
-      </p:sp>
-      <p:sp>
-        <p:nvSpPr>
-          <p:cNvPr id="18" name="Text 16"/>
-          <p:cNvSpPr/>
-          <p:nvPr/>
-        </p:nvSpPr>
-        <p:spPr>
-          <a:xfrm>
-            <a:off x="6400800" y="1188720"/>
-            <a:ext cx="411480" cy="1005840"/>
+          <p:cNvPr id="21" name="Shape 19"/>
+          <p:cNvSpPr/>
+          <p:nvPr/>
+        </p:nvSpPr>
+        <p:spPr>
+          <a:xfrm>
+            <a:off x="457200" y="4480560"/>
+            <a:ext cx="64008" cy="987552"/>
+          </a:xfrm>
+          <a:prstGeom prst="rect">
+            <a:avLst/>
+          </a:prstGeom>
+          <a:solidFill>
+            <a:srgbClr val="D4312A"/>
+          </a:solidFill>
+          <a:ln/>
+        </p:spPr>
+      </p:sp>
+      <p:sp>
+        <p:nvSpPr>
+          <p:cNvPr id="22" name="Shape 20"/>
+          <p:cNvSpPr/>
+          <p:nvPr/>
+        </p:nvSpPr>
+        <p:spPr>
+          <a:xfrm>
+            <a:off x="704088" y="4654296"/>
+            <a:ext cx="640080" cy="640080"/>
+          </a:xfrm>
+          <a:prstGeom prst="rect">
+            <a:avLst/>
+          </a:prstGeom>
+          <a:solidFill>
+            <a:srgbClr val="1E2433"/>
+          </a:solidFill>
+          <a:ln/>
+        </p:spPr>
+      </p:sp>
+      <p:sp>
+        <p:nvSpPr>
+          <p:cNvPr id="23" name="Text 21"/>
+          <p:cNvSpPr/>
+          <p:nvPr/>
+        </p:nvSpPr>
+        <p:spPr>
+          <a:xfrm>
+            <a:off x="704088" y="4654296"/>
+            <a:ext cx="640080" cy="640080"/>
           </a:xfrm>
           <a:prstGeom prst="rect">
             <a:avLst/>
@@ -2962,27 +3737,27 @@
               <a:buNone/>
             </a:pPr>
             <a:r>
-              <a:rPr lang="en-US" sz="1800" b="1" dirty="0">
-                <a:solidFill>
-                  <a:srgbClr val="FFFFFF"/>
-                </a:solidFill>
-              </a:rPr>
-              <a:t>4</a:t>
-            </a:r>
-            <a:endParaRPr lang="en-US" sz="1800" dirty="0"/>
-          </a:p>
-        </p:txBody>
-      </p:sp>
-      <p:sp>
-        <p:nvSpPr>
-          <p:cNvPr id="19" name="Text 17"/>
-          <p:cNvSpPr/>
-          <p:nvPr/>
-        </p:nvSpPr>
-        <p:spPr>
-          <a:xfrm>
-            <a:off x="6949440" y="1280160"/>
-            <a:ext cx="4892040" cy="822960"/>
+              <a:rPr lang="en-US" sz="1400" b="1" dirty="0">
+                <a:solidFill>
+                  <a:srgbClr val="D4312A"/>
+                </a:solidFill>
+              </a:rPr>
+              <a:t>04</a:t>
+            </a:r>
+            <a:endParaRPr lang="en-US" sz="1400" dirty="0"/>
+          </a:p>
+        </p:txBody>
+      </p:sp>
+      <p:sp>
+        <p:nvSpPr>
+          <p:cNvPr id="24" name="Text 22"/>
+          <p:cNvSpPr/>
+          <p:nvPr/>
+        </p:nvSpPr>
+        <p:spPr>
+          <a:xfrm>
+            <a:off x="1508760" y="4562856"/>
+            <a:ext cx="10058400" cy="822960"/>
           </a:xfrm>
           <a:prstGeom prst="rect">
             <a:avLst/>
@@ -3000,10 +3775,10 @@
             <a:r>
               <a:rPr lang="en-US" sz="1300" dirty="0">
                 <a:solidFill>
-                  <a:srgbClr val="1A1A2E"/>
-                </a:solidFill>
-              </a:rPr>
-              <a:t>Loginom поддерживает интеграцию с 1С, SQL-базами, REST/SOAP — характерный стек крупного ритейла</a:t>
+                  <a:srgbClr val="1E2433"/>
+                </a:solidFill>
+              </a:rPr>
+              <a:t>Партнёр Reshape Analytics уже реализовал готовые компоненты для прогнозирования спроса и управления запасами на Loginom, доступные в маркетплейсе — ускоряет старт пилота.</a:t>
             </a:r>
             <a:endParaRPr lang="en-US" sz="1300" dirty="0"/>
           </a:p>
@@ -3011,14 +3786,14 @@
       </p:sp>
       <p:sp>
         <p:nvSpPr>
-          <p:cNvPr id="20" name="Shape 18"/>
-          <p:cNvSpPr/>
-          <p:nvPr/>
-        </p:nvSpPr>
-        <p:spPr>
-          <a:xfrm>
-            <a:off x="6400800" y="2377440"/>
-            <a:ext cx="5577840" cy="1005840"/>
+          <p:cNvPr id="25" name="Shape 23"/>
+          <p:cNvSpPr/>
+          <p:nvPr/>
+        </p:nvSpPr>
+        <p:spPr>
+          <a:xfrm>
+            <a:off x="457200" y="5577840"/>
+            <a:ext cx="11247120" cy="987552"/>
           </a:xfrm>
           <a:prstGeom prst="rect">
             <a:avLst/>
@@ -3028,7 +3803,7 @@
           </a:solidFill>
           <a:ln w="12700">
             <a:solidFill>
-              <a:srgbClr val="D0D8E8"/>
+              <a:srgbClr val="E8EAED"/>
             </a:solidFill>
             <a:prstDash val="solid"/>
           </a:ln>
@@ -3036,34 +3811,54 @@
       </p:sp>
       <p:sp>
         <p:nvSpPr>
-          <p:cNvPr id="21" name="Shape 19"/>
-          <p:cNvSpPr/>
-          <p:nvPr/>
-        </p:nvSpPr>
-        <p:spPr>
-          <a:xfrm>
-            <a:off x="6400800" y="2377440"/>
-            <a:ext cx="411480" cy="1005840"/>
-          </a:xfrm>
-          <a:prstGeom prst="rect">
-            <a:avLst/>
-          </a:prstGeom>
-          <a:solidFill>
-            <a:srgbClr val="1A56A0"/>
-          </a:solidFill>
-          <a:ln/>
-        </p:spPr>
-      </p:sp>
-      <p:sp>
-        <p:nvSpPr>
-          <p:cNvPr id="22" name="Text 20"/>
-          <p:cNvSpPr/>
-          <p:nvPr/>
-        </p:nvSpPr>
-        <p:spPr>
-          <a:xfrm>
-            <a:off x="6400800" y="2377440"/>
-            <a:ext cx="411480" cy="1005840"/>
+          <p:cNvPr id="26" name="Shape 24"/>
+          <p:cNvSpPr/>
+          <p:nvPr/>
+        </p:nvSpPr>
+        <p:spPr>
+          <a:xfrm>
+            <a:off x="457200" y="5577840"/>
+            <a:ext cx="64008" cy="987552"/>
+          </a:xfrm>
+          <a:prstGeom prst="rect">
+            <a:avLst/>
+          </a:prstGeom>
+          <a:solidFill>
+            <a:srgbClr val="D4312A"/>
+          </a:solidFill>
+          <a:ln/>
+        </p:spPr>
+      </p:sp>
+      <p:sp>
+        <p:nvSpPr>
+          <p:cNvPr id="27" name="Shape 25"/>
+          <p:cNvSpPr/>
+          <p:nvPr/>
+        </p:nvSpPr>
+        <p:spPr>
+          <a:xfrm>
+            <a:off x="704088" y="5751576"/>
+            <a:ext cx="640080" cy="640080"/>
+          </a:xfrm>
+          <a:prstGeom prst="rect">
+            <a:avLst/>
+          </a:prstGeom>
+          <a:solidFill>
+            <a:srgbClr val="1E2433"/>
+          </a:solidFill>
+          <a:ln/>
+        </p:spPr>
+      </p:sp>
+      <p:sp>
+        <p:nvSpPr>
+          <p:cNvPr id="28" name="Text 26"/>
+          <p:cNvSpPr/>
+          <p:nvPr/>
+        </p:nvSpPr>
+        <p:spPr>
+          <a:xfrm>
+            <a:off x="704088" y="5751576"/>
+            <a:ext cx="640080" cy="640080"/>
           </a:xfrm>
           <a:prstGeom prst="rect">
             <a:avLst/>
@@ -3079,27 +3874,27 @@
               <a:buNone/>
             </a:pPr>
             <a:r>
-              <a:rPr lang="en-US" sz="1800" b="1" dirty="0">
-                <a:solidFill>
-                  <a:srgbClr val="FFFFFF"/>
-                </a:solidFill>
-              </a:rPr>
-              <a:t>5</a:t>
-            </a:r>
-            <a:endParaRPr lang="en-US" sz="1800" dirty="0"/>
-          </a:p>
-        </p:txBody>
-      </p:sp>
-      <p:sp>
-        <p:nvSpPr>
-          <p:cNvPr id="23" name="Text 21"/>
-          <p:cNvSpPr/>
-          <p:nvPr/>
-        </p:nvSpPr>
-        <p:spPr>
-          <a:xfrm>
-            <a:off x="6949440" y="2468880"/>
-            <a:ext cx="4892040" cy="822960"/>
+              <a:rPr lang="en-US" sz="1400" b="1" dirty="0">
+                <a:solidFill>
+                  <a:srgbClr val="D4312A"/>
+                </a:solidFill>
+              </a:rPr>
+              <a:t>05</a:t>
+            </a:r>
+            <a:endParaRPr lang="en-US" sz="1400" dirty="0"/>
+          </a:p>
+        </p:txBody>
+      </p:sp>
+      <p:sp>
+        <p:nvSpPr>
+          <p:cNvPr id="29" name="Text 27"/>
+          <p:cNvSpPr/>
+          <p:nvPr/>
+        </p:nvSpPr>
+        <p:spPr>
+          <a:xfrm>
+            <a:off x="1508760" y="5660136"/>
+            <a:ext cx="10058400" cy="822960"/>
           </a:xfrm>
           <a:prstGeom prst="rect">
             <a:avLst/>
@@ -3117,10 +3912,10 @@
             <a:r>
               <a:rPr lang="en-US" sz="1300" dirty="0">
                 <a:solidFill>
-                  <a:srgbClr val="1A1A2E"/>
-                </a:solidFill>
-              </a:rPr>
-              <a:t>30 лет экспертизы в аналитике и data science; признан лидером ETL/ELT среди российских платформ</a:t>
+                  <a:srgbClr val="1E2433"/>
+                </a:solidFill>
+              </a:rPr>
+              <a:t>Пилотный формат снижает финансовый риск клиента и позволяет наглядно доказать ROI до полного тиражирования на всю сеть.</a:t>
             </a:r>
             <a:endParaRPr lang="en-US" sz="1300" dirty="0"/>
           </a:p>
@@ -3166,7 +3961,7 @@
             <a:avLst/>
           </a:prstGeom>
           <a:solidFill>
-            <a:srgbClr val="1A56A0"/>
+            <a:srgbClr val="1E2433"/>
           </a:solidFill>
           <a:ln/>
         </p:spPr>
@@ -3222,11 +4017,11 @@
             <a:avLst/>
           </a:prstGeom>
           <a:solidFill>
-            <a:srgbClr val="E8F0FA"/>
+            <a:srgbClr val="F4F5F7"/>
           </a:solidFill>
           <a:ln w="12700">
             <a:solidFill>
-              <a:srgbClr val="D0D8E8"/>
+              <a:srgbClr val="E2E5EA"/>
             </a:solidFill>
             <a:prstDash val="solid"/>
           </a:ln>
@@ -3247,7 +4042,7 @@
             <a:avLst/>
           </a:prstGeom>
           <a:solidFill>
-            <a:srgbClr val="1A56A0"/>
+            <a:srgbClr val="1E2433"/>
           </a:solidFill>
           <a:ln/>
         </p:spPr>
@@ -3282,7 +4077,7 @@
                   <a:srgbClr val="FFFFFF"/>
                 </a:solidFill>
               </a:rPr>
-              <a:t>X5 Retail Group</a:t>
+              <a:t>Hoff (крупный ритейл товаров для дома)</a:t>
             </a:r>
             <a:endParaRPr lang="en-US" sz="1300" dirty="0"/>
           </a:p>
@@ -3315,10 +4110,10 @@
             <a:r>
               <a:rPr lang="en-US" sz="1200" dirty="0">
                 <a:solidFill>
-                  <a:srgbClr val="1A1A2E"/>
-                </a:solidFill>
-              </a:rPr>
-              <a:t>Реализация аналитической системы для крупнейшего российского ритейлера на базе Loginom. Обработка больших объёмов транзакционных данных, интеграция с корпоративными источниками.</a:t>
+                  <a:srgbClr val="1E2433"/>
+                </a:solidFill>
+              </a:rPr>
+              <a:t>Внедрение интегрированной системы планирования на Loginom совместно с Reshape Analytics: прогнозирование спроса, управление товарными запасами, координация поставщиков. Подход быстрого прототипирования (MVP), архитектура Loginom + Planicum.</a:t>
             </a:r>
             <a:endParaRPr lang="en-US" sz="1200" dirty="0"/>
           </a:p>
@@ -3339,7 +4134,7 @@
             <a:avLst/>
           </a:prstGeom>
           <a:solidFill>
-            <a:srgbClr val="1A56A0"/>
+            <a:srgbClr val="1E2433"/>
           </a:solidFill>
           <a:ln/>
         </p:spPr>
@@ -3371,10 +4166,10 @@
             <a:r>
               <a:rPr lang="en-US" sz="1200" b="1" dirty="0">
                 <a:solidFill>
-                  <a:srgbClr val="1A56A0"/>
-                </a:solidFill>
-              </a:rPr>
-              <a:t>Результат: Автоматизация аналитических процессов, снижение нагрузки на аналитические подразделения</a:t>
+                  <a:srgbClr val="D4312A"/>
+                </a:solidFill>
+              </a:rPr>
+              <a:t>Результат: Время разработки MVP сокращено с 5 до 2–3 месяцев; система стала «нервной тканью» для управления запасами всей торговой сети.</a:t>
             </a:r>
             <a:endParaRPr lang="en-US" sz="1200" dirty="0"/>
           </a:p>
@@ -3395,11 +4190,11 @@
             <a:avLst/>
           </a:prstGeom>
           <a:solidFill>
-            <a:srgbClr val="E8F0FA"/>
+            <a:srgbClr val="F4F5F7"/>
           </a:solidFill>
           <a:ln w="12700">
             <a:solidFill>
-              <a:srgbClr val="D0D8E8"/>
+              <a:srgbClr val="E2E5EA"/>
             </a:solidFill>
             <a:prstDash val="solid"/>
           </a:ln>
@@ -3420,7 +4215,7 @@
             <a:avLst/>
           </a:prstGeom>
           <a:solidFill>
-            <a:srgbClr val="1A56A0"/>
+            <a:srgbClr val="1E2433"/>
           </a:solidFill>
           <a:ln/>
         </p:spPr>
@@ -3455,7 +4250,7 @@
                   <a:srgbClr val="FFFFFF"/>
                 </a:solidFill>
               </a:rPr>
-              <a:t>Hoff (мультиформатный ритейлер)</a:t>
+              <a:t>SUNLIGHT (ювелирная сеть, 480+ магазинов)</a:t>
             </a:r>
             <a:endParaRPr lang="en-US" sz="1300" dirty="0"/>
           </a:p>
@@ -3488,10 +4283,10 @@
             <a:r>
               <a:rPr lang="en-US" sz="1200" dirty="0">
                 <a:solidFill>
-                  <a:srgbClr val="1A1A2E"/>
-                </a:solidFill>
-              </a:rPr>
-              <a:t>Построение аналитической системы для ритейлера товаров для дома. Анализ продаж, ассортиментная аналитика.</a:t>
+                  <a:srgbClr val="1E2433"/>
+                </a:solidFill>
+              </a:rPr>
+              <a:t>Создание с нуля системы планирования пополнения e-commerce с ассортиментом 50 000+ наименований силами бизнес-пользователей на low-code платформе Loginom за 3 месяца. Интеграция с SQL Server, PostgreSQL, ClickHouse и ERP.</a:t>
             </a:r>
             <a:endParaRPr lang="en-US" sz="1200" dirty="0"/>
           </a:p>
@@ -3512,7 +4307,7 @@
             <a:avLst/>
           </a:prstGeom>
           <a:solidFill>
-            <a:srgbClr val="1A56A0"/>
+            <a:srgbClr val="1E2433"/>
           </a:solidFill>
           <a:ln/>
         </p:spPr>
@@ -3544,10 +4339,10 @@
             <a:r>
               <a:rPr lang="en-US" sz="1200" b="1" dirty="0">
                 <a:solidFill>
-                  <a:srgbClr val="1A56A0"/>
-                </a:solidFill>
-              </a:rPr>
-              <a:t>Результат: Ускорение принятия решений по ассортименту и заказам</a:t>
+                  <a:srgbClr val="D4312A"/>
+                </a:solidFill>
+              </a:rPr>
+              <a:t>Результат: Многократное сокращение трудозатрат на пополнение запасов; бизнес-пользователи полностью самостоятельно управляют системой без привлечения ИТ-отдела.</a:t>
             </a:r>
             <a:endParaRPr lang="en-US" sz="1200" dirty="0"/>
           </a:p>
@@ -3568,11 +4363,11 @@
             <a:avLst/>
           </a:prstGeom>
           <a:solidFill>
-            <a:srgbClr val="E8F0FA"/>
+            <a:srgbClr val="F4F5F7"/>
           </a:solidFill>
           <a:ln w="12700">
             <a:solidFill>
-              <a:srgbClr val="D0D8E8"/>
+              <a:srgbClr val="E2E5EA"/>
             </a:solidFill>
             <a:prstDash val="solid"/>
           </a:ln>
@@ -3593,7 +4388,7 @@
             <a:avLst/>
           </a:prstGeom>
           <a:solidFill>
-            <a:srgbClr val="1A56A0"/>
+            <a:srgbClr val="1E2433"/>
           </a:solidFill>
           <a:ln/>
         </p:spPr>
@@ -3628,7 +4423,7 @@
                   <a:srgbClr val="FFFFFF"/>
                 </a:solidFill>
               </a:rPr>
-              <a:t>Ситилинк</a:t>
+              <a:t>Estée Lauder (розничная сеть, 10 000+ SKU)</a:t>
             </a:r>
             <a:endParaRPr lang="en-US" sz="1300" dirty="0"/>
           </a:p>
@@ -3661,10 +4456,10 @@
             <a:r>
               <a:rPr lang="en-US" sz="1200" dirty="0">
                 <a:solidFill>
-                  <a:srgbClr val="1A1A2E"/>
-                </a:solidFill>
-              </a:rPr>
-              <a:t>Разработка системы анализа данных для крупной розничной сети электроники. Интеграция с торговыми данными.</a:t>
+                  <a:srgbClr val="1E2433"/>
+                </a:solidFill>
+              </a:rPr>
+              <a:t>Автоматизация прогнозирования розничных продаж в off-line и on-line каналах. Сценарий из 18 измерений, 37 процессов, 300+ источников данных. Учёт сезонности, промо, приоритетности каналов.</a:t>
             </a:r>
             <a:endParaRPr lang="en-US" sz="1200" dirty="0"/>
           </a:p>
@@ -3685,7 +4480,7 @@
             <a:avLst/>
           </a:prstGeom>
           <a:solidFill>
-            <a:srgbClr val="1A56A0"/>
+            <a:srgbClr val="1E2433"/>
           </a:solidFill>
           <a:ln/>
         </p:spPr>
@@ -3717,10 +4512,10 @@
             <a:r>
               <a:rPr lang="en-US" sz="1200" b="1" dirty="0">
                 <a:solidFill>
-                  <a:srgbClr val="1A56A0"/>
-                </a:solidFill>
-              </a:rPr>
-              <a:t>Результат: Оптимизация товарных процессов и повышение эффективности управления ассортиментом</a:t>
+                  <a:srgbClr val="D4312A"/>
+                </a:solidFill>
+              </a:rPr>
+              <a:t>Результат: Обработка полного сценария прогнозирования — 1 минута вместо многочасовой ручной работы; справедливое распределение ограниченного запаса по всем торговым точкам.</a:t>
             </a:r>
             <a:endParaRPr lang="en-US" sz="1200" dirty="0"/>
           </a:p>
@@ -3766,7 +4561,7 @@
             <a:avLst/>
           </a:prstGeom>
           <a:solidFill>
-            <a:srgbClr val="1A56A0"/>
+            <a:srgbClr val="1E2433"/>
           </a:solidFill>
           <a:ln/>
         </p:spPr>
@@ -3815,18 +4610,442 @@
         </p:nvSpPr>
         <p:spPr>
           <a:xfrm>
-            <a:off x="365760" y="1097280"/>
-            <a:ext cx="11430000" cy="5029200"/>
-          </a:xfrm>
-          <a:prstGeom prst="rect">
-            <a:avLst/>
-          </a:prstGeom>
-          <a:solidFill>
-            <a:srgbClr val="E8F0FA"/>
+            <a:off x="0" y="1005840"/>
+            <a:ext cx="4114800" cy="5852160"/>
+          </a:xfrm>
+          <a:prstGeom prst="rect">
+            <a:avLst/>
+          </a:prstGeom>
+          <a:solidFill>
+            <a:srgbClr val="1E2433"/>
+          </a:solidFill>
+          <a:ln/>
+        </p:spPr>
+      </p:sp>
+      <p:sp>
+        <p:nvSpPr>
+          <p:cNvPr id="5" name="Shape 3"/>
+          <p:cNvSpPr/>
+          <p:nvPr/>
+        </p:nvSpPr>
+        <p:spPr>
+          <a:xfrm>
+            <a:off x="365760" y="1371600"/>
+            <a:ext cx="1645920" cy="54864"/>
+          </a:xfrm>
+          <a:prstGeom prst="rect">
+            <a:avLst/>
+          </a:prstGeom>
+          <a:solidFill>
+            <a:srgbClr val="D4312A"/>
+          </a:solidFill>
+          <a:ln/>
+        </p:spPr>
+      </p:sp>
+      <p:sp>
+        <p:nvSpPr>
+          <p:cNvPr id="6" name="Text 4"/>
+          <p:cNvSpPr/>
+          <p:nvPr/>
+        </p:nvSpPr>
+        <p:spPr>
+          <a:xfrm>
+            <a:off x="365760" y="1508760"/>
+            <a:ext cx="3383280" cy="411480"/>
+          </a:xfrm>
+          <a:prstGeom prst="rect">
+            <a:avLst/>
+          </a:prstGeom>
+          <a:noFill/>
+          <a:ln/>
+        </p:spPr>
+        <p:txBody>
+          <a:bodyPr wrap="square" rtlCol="0" anchor="ctr"/>
+          <a:lstStyle/>
+          <a:p>
+            <a:pPr indent="0" marL="0">
+              <a:buNone/>
+            </a:pPr>
+            <a:r>
+              <a:rPr lang="en-US" sz="1300" b="1" dirty="0">
+                <a:solidFill>
+                  <a:srgbClr val="D4312A"/>
+                </a:solidFill>
+              </a:rPr>
+              <a:t>Ключевые факты</a:t>
+            </a:r>
+            <a:endParaRPr lang="en-US" sz="1300" dirty="0"/>
+          </a:p>
+        </p:txBody>
+      </p:sp>
+      <p:sp>
+        <p:nvSpPr>
+          <p:cNvPr id="7" name="Text 5"/>
+          <p:cNvSpPr/>
+          <p:nvPr/>
+        </p:nvSpPr>
+        <p:spPr>
+          <a:xfrm>
+            <a:off x="365760" y="2103120"/>
+            <a:ext cx="3383280" cy="658368"/>
+          </a:xfrm>
+          <a:prstGeom prst="rect">
+            <a:avLst/>
+          </a:prstGeom>
+          <a:noFill/>
+          <a:ln/>
+        </p:spPr>
+        <p:txBody>
+          <a:bodyPr wrap="square" rtlCol="0" anchor="ctr"/>
+          <a:lstStyle/>
+          <a:p>
+            <a:pPr indent="0" marL="0">
+              <a:buNone/>
+            </a:pPr>
+            <a:r>
+              <a:rPr lang="en-US" sz="3000" b="1" dirty="0">
+                <a:solidFill>
+                  <a:srgbClr val="FFFFFF"/>
+                </a:solidFill>
+              </a:rPr>
+              <a:t>30+</a:t>
+            </a:r>
+            <a:endParaRPr lang="en-US" sz="3000" dirty="0"/>
+          </a:p>
+        </p:txBody>
+      </p:sp>
+      <p:sp>
+        <p:nvSpPr>
+          <p:cNvPr id="8" name="Text 6"/>
+          <p:cNvSpPr/>
+          <p:nvPr/>
+        </p:nvSpPr>
+        <p:spPr>
+          <a:xfrm>
+            <a:off x="365760" y="2761488"/>
+            <a:ext cx="3383280" cy="320040"/>
+          </a:xfrm>
+          <a:prstGeom prst="rect">
+            <a:avLst/>
+          </a:prstGeom>
+          <a:noFill/>
+          <a:ln/>
+        </p:spPr>
+        <p:txBody>
+          <a:bodyPr wrap="square" rtlCol="0" anchor="ctr"/>
+          <a:lstStyle/>
+          <a:p>
+            <a:pPr indent="0" marL="0">
+              <a:buNone/>
+            </a:pPr>
+            <a:r>
+              <a:rPr lang="en-US" sz="1050" dirty="0">
+                <a:solidFill>
+                  <a:srgbClr val="8A93A2"/>
+                </a:solidFill>
+              </a:rPr>
+              <a:t>Лет на рынке</a:t>
+            </a:r>
+            <a:endParaRPr lang="en-US" sz="1050" dirty="0"/>
+          </a:p>
+        </p:txBody>
+      </p:sp>
+      <p:sp>
+        <p:nvSpPr>
+          <p:cNvPr id="9" name="Shape 7"/>
+          <p:cNvSpPr/>
+          <p:nvPr/>
+        </p:nvSpPr>
+        <p:spPr>
+          <a:xfrm>
+            <a:off x="365760" y="3154680"/>
+            <a:ext cx="2926080" cy="27432"/>
+          </a:xfrm>
+          <a:prstGeom prst="rect">
+            <a:avLst/>
+          </a:prstGeom>
+          <a:solidFill>
+            <a:srgbClr val="2A3144"/>
+          </a:solidFill>
+          <a:ln/>
+        </p:spPr>
+      </p:sp>
+      <p:sp>
+        <p:nvSpPr>
+          <p:cNvPr id="10" name="Text 8"/>
+          <p:cNvSpPr/>
+          <p:nvPr/>
+        </p:nvSpPr>
+        <p:spPr>
+          <a:xfrm>
+            <a:off x="365760" y="3246120"/>
+            <a:ext cx="3383280" cy="658368"/>
+          </a:xfrm>
+          <a:prstGeom prst="rect">
+            <a:avLst/>
+          </a:prstGeom>
+          <a:noFill/>
+          <a:ln/>
+        </p:spPr>
+        <p:txBody>
+          <a:bodyPr wrap="square" rtlCol="0" anchor="ctr"/>
+          <a:lstStyle/>
+          <a:p>
+            <a:pPr indent="0" marL="0">
+              <a:buNone/>
+            </a:pPr>
+            <a:r>
+              <a:rPr lang="en-US" sz="3000" b="1" dirty="0">
+                <a:solidFill>
+                  <a:srgbClr val="FFFFFF"/>
+                </a:solidFill>
+              </a:rPr>
+              <a:t>80+</a:t>
+            </a:r>
+            <a:endParaRPr lang="en-US" sz="3000" dirty="0"/>
+          </a:p>
+        </p:txBody>
+      </p:sp>
+      <p:sp>
+        <p:nvSpPr>
+          <p:cNvPr id="11" name="Text 9"/>
+          <p:cNvSpPr/>
+          <p:nvPr/>
+        </p:nvSpPr>
+        <p:spPr>
+          <a:xfrm>
+            <a:off x="365760" y="3904488"/>
+            <a:ext cx="3383280" cy="320040"/>
+          </a:xfrm>
+          <a:prstGeom prst="rect">
+            <a:avLst/>
+          </a:prstGeom>
+          <a:noFill/>
+          <a:ln/>
+        </p:spPr>
+        <p:txBody>
+          <a:bodyPr wrap="square" rtlCol="0" anchor="ctr"/>
+          <a:lstStyle/>
+          <a:p>
+            <a:pPr indent="0" marL="0">
+              <a:buNone/>
+            </a:pPr>
+            <a:r>
+              <a:rPr lang="en-US" sz="1050" dirty="0">
+                <a:solidFill>
+                  <a:srgbClr val="8A93A2"/>
+                </a:solidFill>
+              </a:rPr>
+              <a:t>Клиентов</a:t>
+            </a:r>
+            <a:endParaRPr lang="en-US" sz="1050" dirty="0"/>
+          </a:p>
+        </p:txBody>
+      </p:sp>
+      <p:sp>
+        <p:nvSpPr>
+          <p:cNvPr id="12" name="Shape 10"/>
+          <p:cNvSpPr/>
+          <p:nvPr/>
+        </p:nvSpPr>
+        <p:spPr>
+          <a:xfrm>
+            <a:off x="365760" y="4297680"/>
+            <a:ext cx="2926080" cy="27432"/>
+          </a:xfrm>
+          <a:prstGeom prst="rect">
+            <a:avLst/>
+          </a:prstGeom>
+          <a:solidFill>
+            <a:srgbClr val="2A3144"/>
+          </a:solidFill>
+          <a:ln/>
+        </p:spPr>
+      </p:sp>
+      <p:sp>
+        <p:nvSpPr>
+          <p:cNvPr id="13" name="Text 11"/>
+          <p:cNvSpPr/>
+          <p:nvPr/>
+        </p:nvSpPr>
+        <p:spPr>
+          <a:xfrm>
+            <a:off x="365760" y="4389120"/>
+            <a:ext cx="3383280" cy="658368"/>
+          </a:xfrm>
+          <a:prstGeom prst="rect">
+            <a:avLst/>
+          </a:prstGeom>
+          <a:noFill/>
+          <a:ln/>
+        </p:spPr>
+        <p:txBody>
+          <a:bodyPr wrap="square" rtlCol="0" anchor="ctr"/>
+          <a:lstStyle/>
+          <a:p>
+            <a:pPr indent="0" marL="0">
+              <a:buNone/>
+            </a:pPr>
+            <a:r>
+              <a:rPr lang="en-US" sz="3000" b="1" dirty="0">
+                <a:solidFill>
+                  <a:srgbClr val="FFFFFF"/>
+                </a:solidFill>
+              </a:rPr>
+              <a:t>100+</a:t>
+            </a:r>
+            <a:endParaRPr lang="en-US" sz="3000" dirty="0"/>
+          </a:p>
+        </p:txBody>
+      </p:sp>
+      <p:sp>
+        <p:nvSpPr>
+          <p:cNvPr id="14" name="Text 12"/>
+          <p:cNvSpPr/>
+          <p:nvPr/>
+        </p:nvSpPr>
+        <p:spPr>
+          <a:xfrm>
+            <a:off x="365760" y="5047488"/>
+            <a:ext cx="3383280" cy="320040"/>
+          </a:xfrm>
+          <a:prstGeom prst="rect">
+            <a:avLst/>
+          </a:prstGeom>
+          <a:noFill/>
+          <a:ln/>
+        </p:spPr>
+        <p:txBody>
+          <a:bodyPr wrap="square" rtlCol="0" anchor="ctr"/>
+          <a:lstStyle/>
+          <a:p>
+            <a:pPr indent="0" marL="0">
+              <a:buNone/>
+            </a:pPr>
+            <a:r>
+              <a:rPr lang="en-US" sz="1050" dirty="0">
+                <a:solidFill>
+                  <a:srgbClr val="8A93A2"/>
+                </a:solidFill>
+              </a:rPr>
+              <a:t>Вузов-партнёров</a:t>
+            </a:r>
+            <a:endParaRPr lang="en-US" sz="1050" dirty="0"/>
+          </a:p>
+        </p:txBody>
+      </p:sp>
+      <p:sp>
+        <p:nvSpPr>
+          <p:cNvPr id="15" name="Shape 13"/>
+          <p:cNvSpPr/>
+          <p:nvPr/>
+        </p:nvSpPr>
+        <p:spPr>
+          <a:xfrm>
+            <a:off x="365760" y="5440680"/>
+            <a:ext cx="2926080" cy="27432"/>
+          </a:xfrm>
+          <a:prstGeom prst="rect">
+            <a:avLst/>
+          </a:prstGeom>
+          <a:solidFill>
+            <a:srgbClr val="2A3144"/>
+          </a:solidFill>
+          <a:ln/>
+        </p:spPr>
+      </p:sp>
+      <p:sp>
+        <p:nvSpPr>
+          <p:cNvPr id="16" name="Text 14"/>
+          <p:cNvSpPr/>
+          <p:nvPr/>
+        </p:nvSpPr>
+        <p:spPr>
+          <a:xfrm>
+            <a:off x="365760" y="5532120"/>
+            <a:ext cx="3383280" cy="658368"/>
+          </a:xfrm>
+          <a:prstGeom prst="rect">
+            <a:avLst/>
+          </a:prstGeom>
+          <a:noFill/>
+          <a:ln/>
+        </p:spPr>
+        <p:txBody>
+          <a:bodyPr wrap="square" rtlCol="0" anchor="ctr"/>
+          <a:lstStyle/>
+          <a:p>
+            <a:pPr indent="0" marL="0">
+              <a:buNone/>
+            </a:pPr>
+            <a:r>
+              <a:rPr lang="en-US" sz="3000" b="1" dirty="0">
+                <a:solidFill>
+                  <a:srgbClr val="FFFFFF"/>
+                </a:solidFill>
+              </a:rPr>
+              <a:t>24+</a:t>
+            </a:r>
+            <a:endParaRPr lang="en-US" sz="3000" dirty="0"/>
+          </a:p>
+        </p:txBody>
+      </p:sp>
+      <p:sp>
+        <p:nvSpPr>
+          <p:cNvPr id="17" name="Text 15"/>
+          <p:cNvSpPr/>
+          <p:nvPr/>
+        </p:nvSpPr>
+        <p:spPr>
+          <a:xfrm>
+            <a:off x="365760" y="6190488"/>
+            <a:ext cx="3383280" cy="320040"/>
+          </a:xfrm>
+          <a:prstGeom prst="rect">
+            <a:avLst/>
+          </a:prstGeom>
+          <a:noFill/>
+          <a:ln/>
+        </p:spPr>
+        <p:txBody>
+          <a:bodyPr wrap="square" rtlCol="0" anchor="ctr"/>
+          <a:lstStyle/>
+          <a:p>
+            <a:pPr indent="0" marL="0">
+              <a:buNone/>
+            </a:pPr>
+            <a:r>
+              <a:rPr lang="en-US" sz="1050" dirty="0">
+                <a:solidFill>
+                  <a:srgbClr val="8A93A2"/>
+                </a:solidFill>
+              </a:rPr>
+              <a:t>ИТ-партнёров</a:t>
+            </a:r>
+            <a:endParaRPr lang="en-US" sz="1050" dirty="0"/>
+          </a:p>
+        </p:txBody>
+      </p:sp>
+      <p:sp>
+        <p:nvSpPr>
+          <p:cNvPr id="18" name="Shape 16"/>
+          <p:cNvSpPr/>
+          <p:nvPr/>
+        </p:nvSpPr>
+        <p:spPr>
+          <a:xfrm>
+            <a:off x="4343400" y="1097280"/>
+            <a:ext cx="7498080" cy="5577840"/>
+          </a:xfrm>
+          <a:prstGeom prst="rect">
+            <a:avLst/>
+          </a:prstGeom>
+          <a:solidFill>
+            <a:srgbClr val="F4F5F7"/>
           </a:solidFill>
           <a:ln w="12700">
             <a:solidFill>
-              <a:srgbClr val="D0D8E8"/>
+              <a:srgbClr val="E2E5EA"/>
             </a:solidFill>
             <a:prstDash val="solid"/>
           </a:ln>
@@ -3834,14 +5053,14 @@
       </p:sp>
       <p:sp>
         <p:nvSpPr>
-          <p:cNvPr id="5" name="Text 3"/>
-          <p:cNvSpPr/>
-          <p:nvPr/>
-        </p:nvSpPr>
-        <p:spPr>
-          <a:xfrm>
-            <a:off x="640080" y="1280160"/>
-            <a:ext cx="10972800" cy="4663440"/>
+          <p:cNvPr id="19" name="Text 17"/>
+          <p:cNvSpPr/>
+          <p:nvPr/>
+        </p:nvSpPr>
+        <p:spPr>
+          <a:xfrm>
+            <a:off x="4617720" y="1280160"/>
+            <a:ext cx="6949440" cy="5212080"/>
           </a:xfrm>
           <a:prstGeom prst="rect">
             <a:avLst/>
@@ -3855,19 +5074,19 @@
           <a:p>
             <a:pPr indent="0" marL="0">
               <a:lnSpc>
-                <a:spcPct val="150000"/>
+                <a:spcPct val="160000"/>
               </a:lnSpc>
               <a:buNone/>
             </a:pPr>
             <a:r>
-              <a:rPr lang="en-US" sz="1300" dirty="0">
-                <a:solidFill>
-                  <a:srgbClr val="1A1A2E"/>
-                </a:solidFill>
-              </a:rPr>
-              <a:t>Loginom Company (ООО «Аналитические технологии») — российский профессиональный разработчик продуктов и решений в области анализа данных, основан в 1995 году. Специализируется на разработке систем для глубокого анализа данных: сбор, интеграция, очистка, построение ML-моделей и визуализация. Создаёт аналитические системы как для коммерческих, так и для государственных компаний. В 2025 году отметила 30-летие. Признана лидером исследования российских ETL/ELT-платформ. Среди клиентов: X5 Retail Group, Балтика, Интер РАО, Эстée Lauder, Сбербанк КИБ, ВТБ Лизинг и многие другие. Включена в реестр российских программ (ЕРРП № 4504).</a:t>
-            </a:r>
-            <a:endParaRPr lang="en-US" sz="1300" dirty="0"/>
+              <a:rPr lang="en-US" sz="1200" dirty="0">
+                <a:solidFill>
+                  <a:srgbClr val="1E2433"/>
+                </a:solidFill>
+              </a:rPr>
+              <a:t>Loginom Company (ООО «Аналитические технологии») — профессиональный разработчик продуктов и решений в области анализа данных, основан в 1995 году. Компания специализируется на разработке систем для глубокого анализа данных: сбор, интеграция, очистка, построение моделей, визуализация и развёртывание. Ключевой продукт — low-code аналитическая платформа Loginom, внесённая в реестр российских программ (№ 4504). За 30 лет компания прошла путь от разработчика заказного ПО до вендора enterprise-решений в области аналитики и управления данными, сформировав экспертизу в ETL, data-платформах и системах поддержки принятия решений. Обслуживает коммерческие и государственные организации по всей России.</a:t>
+            </a:r>
+            <a:endParaRPr lang="en-US" sz="1200" dirty="0"/>
           </a:p>
         </p:txBody>
       </p:sp>
@@ -3911,7 +5130,7 @@
             <a:avLst/>
           </a:prstGeom>
           <a:solidFill>
-            <a:srgbClr val="1A56A0"/>
+            <a:srgbClr val="1E2433"/>
           </a:solidFill>
           <a:ln/>
         </p:spPr>
@@ -3967,7 +5186,7 @@
             <a:avLst/>
           </a:prstGeom>
           <a:solidFill>
-            <a:srgbClr val="1A56A0"/>
+            <a:srgbClr val="1E2433"/>
           </a:solidFill>
           <a:ln/>
         </p:spPr>
@@ -4035,7 +5254,7 @@
             <a:r>
               <a:rPr lang="en-US" sz="1400" dirty="0">
                 <a:solidFill>
-                  <a:srgbClr val="1A1A2E"/>
+                  <a:srgbClr val="1E2433"/>
                 </a:solidFill>
               </a:rPr>
               <a:t>Ответный звонок для уточнения деталей задачи</a:t>
@@ -4059,7 +5278,7 @@
             <a:avLst/>
           </a:prstGeom>
           <a:solidFill>
-            <a:srgbClr val="1A56A0"/>
+            <a:srgbClr val="1E2433"/>
           </a:solidFill>
           <a:ln/>
         </p:spPr>
@@ -4127,7 +5346,7 @@
             <a:r>
               <a:rPr lang="en-US" sz="1400" dirty="0">
                 <a:solidFill>
-                  <a:srgbClr val="1A1A2E"/>
+                  <a:srgbClr val="1E2433"/>
                 </a:solidFill>
               </a:rPr>
               <a:t>Подготовка технического предложения (2 недели)</a:t>
@@ -4151,7 +5370,7 @@
             <a:avLst/>
           </a:prstGeom>
           <a:solidFill>
-            <a:srgbClr val="1A56A0"/>
+            <a:srgbClr val="1E2433"/>
           </a:solidFill>
           <a:ln/>
         </p:spPr>
@@ -4219,7 +5438,7 @@
             <a:r>
               <a:rPr lang="en-US" sz="1400" dirty="0">
                 <a:solidFill>
-                  <a:srgbClr val="1A1A2E"/>
+                  <a:srgbClr val="1E2433"/>
                 </a:solidFill>
               </a:rPr>
               <a:t>Согласование условий и подписание договора</a:t>
@@ -4243,7 +5462,7 @@
             <a:avLst/>
           </a:prstGeom>
           <a:solidFill>
-            <a:srgbClr val="1A56A0"/>
+            <a:srgbClr val="1E2433"/>
           </a:solidFill>
           <a:ln/>
         </p:spPr>
@@ -4311,7 +5530,7 @@
             <a:r>
               <a:rPr lang="en-US" sz="1400" dirty="0">
                 <a:solidFill>
-                  <a:srgbClr val="1A1A2E"/>
+                  <a:srgbClr val="1E2433"/>
                 </a:solidFill>
               </a:rPr>
               <a:t>Старт проекта</a:t>
@@ -4335,7 +5554,7 @@
             <a:avLst/>
           </a:prstGeom>
           <a:solidFill>
-            <a:srgbClr val="1A56A0"/>
+            <a:srgbClr val="1E2433"/>
           </a:solidFill>
           <a:ln/>
         </p:spPr>
@@ -4403,7 +5622,7 @@
             <a:r>
               <a:rPr lang="en-US" sz="1300" dirty="0">
                 <a:solidFill>
-                  <a:srgbClr val="AACCEE"/>
+                  <a:srgbClr val="9BA3B0"/>
                 </a:solidFill>
               </a:rPr>
               <a:t>sales@loginom.ru</a:t>
@@ -4417,7 +5636,7 @@
             <a:r>
               <a:rPr lang="en-US" sz="1300" dirty="0">
                 <a:solidFill>
-                  <a:srgbClr val="AACCEE"/>
+                  <a:srgbClr val="9BA3B0"/>
                 </a:solidFill>
               </a:rPr>
               <a:t>+7 (383) 206-09-40</a:t>
@@ -4431,7 +5650,7 @@
             <a:r>
               <a:rPr lang="en-US" sz="1300" dirty="0">
                 <a:solidFill>
-                  <a:srgbClr val="AACCEE"/>
+                  <a:srgbClr val="9BA3B0"/>
                 </a:solidFill>
               </a:rPr>
               <a:t>loginom.ru</a:t>
@@ -4455,7 +5674,7 @@
             <a:avLst/>
           </a:prstGeom>
           <a:solidFill>
-            <a:srgbClr val="3A6EB5"/>
+            <a:srgbClr val="252B3B"/>
           </a:solidFill>
           <a:ln/>
         </p:spPr>
@@ -4487,7 +5706,7 @@
             <a:r>
               <a:rPr lang="en-US" sz="1100" dirty="0">
                 <a:solidFill>
-                  <a:srgbClr val="AACCEE"/>
+                  <a:srgbClr val="9BA3B0"/>
                 </a:solidFill>
               </a:rPr>
               <a:t>Подготовлено для:</a:t>
@@ -4501,7 +5720,7 @@
             <a:r>
               <a:rPr lang="en-US" sz="1100" dirty="0">
                 <a:solidFill>
-                  <a:srgbClr val="AACCEE"/>
+                  <a:srgbClr val="9BA3B0"/>
                 </a:solidFill>
               </a:rPr>
               <a:t>Алексей Петров</a:t>
@@ -4515,7 +5734,7 @@
             <a:r>
               <a:rPr lang="en-US" sz="1100" dirty="0">
                 <a:solidFill>
-                  <a:srgbClr val="AACCEE"/>
+                  <a:srgbClr val="9BA3B0"/>
                 </a:solidFill>
               </a:rPr>
               <a:t>a.petrov@magnit.com</a:t>
